--- a/public/videos/repositories/reservation-waiting-time-v1/reservation-waiting-time-v1-tech-preview.pptx
+++ b/public/videos/repositories/reservation-waiting-time-v1/reservation-waiting-time-v1-tech-preview.pptx
@@ -134,7 +134,7 @@
           <p:cNvPr id="2" name="タイトル 1">
             <a:extLst>
               <a:ext uri="{FF2B5EF4-FFF2-40B4-BE49-F238E27FC236}">
-                <a16:creationId xmlns:a16="http://schemas.microsoft.com/office/drawing/2014/main" id="{C1B64382-C345-A005-2CF3-EC97995DA62F}"/>
+                <a16:creationId xmlns:a16="http://schemas.microsoft.com/office/drawing/2014/main" id="{E54242E1-121B-DEDE-C0DF-C40446F5E1A5}"/>
               </a:ext>
             </a:extLst>
           </p:cNvPr>
@@ -171,7 +171,7 @@
           <p:cNvPr id="3" name="字幕 2">
             <a:extLst>
               <a:ext uri="{FF2B5EF4-FFF2-40B4-BE49-F238E27FC236}">
-                <a16:creationId xmlns:a16="http://schemas.microsoft.com/office/drawing/2014/main" id="{BBFEDD2D-BABD-DE33-3AD1-FEF29266858B}"/>
+                <a16:creationId xmlns:a16="http://schemas.microsoft.com/office/drawing/2014/main" id="{E5F5583F-EB2E-C1C4-901F-EBE3A78F12B1}"/>
               </a:ext>
             </a:extLst>
           </p:cNvPr>
@@ -241,7 +241,7 @@
           <p:cNvPr id="4" name="日付プレースホルダー 3">
             <a:extLst>
               <a:ext uri="{FF2B5EF4-FFF2-40B4-BE49-F238E27FC236}">
-                <a16:creationId xmlns:a16="http://schemas.microsoft.com/office/drawing/2014/main" id="{0D02EF85-F4D7-E9BF-676E-6E5C41B78841}"/>
+                <a16:creationId xmlns:a16="http://schemas.microsoft.com/office/drawing/2014/main" id="{8D038554-957B-38C4-23E1-83236A76118B}"/>
               </a:ext>
             </a:extLst>
           </p:cNvPr>
@@ -257,7 +257,7 @@
           <a:bodyPr/>
           <a:lstStyle/>
           <a:p>
-            <a:fld id="{4347556D-961C-42B8-9381-BED9000E7EAE}" type="datetimeFigureOut">
+            <a:fld id="{5112284A-C95D-47F3-91B2-D34146ECB8CF}" type="datetimeFigureOut">
               <a:rPr kumimoji="1" lang="ja-JP" altLang="en-US" smtClean="0"/>
               <a:t>2026/7/30</a:t>
             </a:fld>
@@ -270,7 +270,7 @@
           <p:cNvPr id="5" name="フッター プレースホルダー 4">
             <a:extLst>
               <a:ext uri="{FF2B5EF4-FFF2-40B4-BE49-F238E27FC236}">
-                <a16:creationId xmlns:a16="http://schemas.microsoft.com/office/drawing/2014/main" id="{2F6FACF9-5B29-27C4-D1F4-6FC317D8B003}"/>
+                <a16:creationId xmlns:a16="http://schemas.microsoft.com/office/drawing/2014/main" id="{76CC0869-FB46-17CC-2FF4-866E05A60ACD}"/>
               </a:ext>
             </a:extLst>
           </p:cNvPr>
@@ -295,7 +295,7 @@
           <p:cNvPr id="6" name="スライド番号プレースホルダー 5">
             <a:extLst>
               <a:ext uri="{FF2B5EF4-FFF2-40B4-BE49-F238E27FC236}">
-                <a16:creationId xmlns:a16="http://schemas.microsoft.com/office/drawing/2014/main" id="{A8EEAE25-0BEA-7A8E-BA04-DA10C00CC24D}"/>
+                <a16:creationId xmlns:a16="http://schemas.microsoft.com/office/drawing/2014/main" id="{0016451F-8BA7-1B66-35F0-66611CB8E561}"/>
               </a:ext>
             </a:extLst>
           </p:cNvPr>
@@ -311,7 +311,7 @@
           <a:bodyPr/>
           <a:lstStyle/>
           <a:p>
-            <a:fld id="{A880647F-F25E-4D2A-87A2-702BADF422CB}" type="slidenum">
+            <a:fld id="{C23EBC2A-0C05-4802-9AAF-93E32E64FFA0}" type="slidenum">
               <a:rPr kumimoji="1" lang="ja-JP" altLang="en-US" smtClean="0"/>
               <a:t>‹#›</a:t>
             </a:fld>
@@ -322,7 +322,7 @@
     </p:spTree>
     <p:extLst>
       <p:ext uri="{BB962C8B-B14F-4D97-AF65-F5344CB8AC3E}">
-        <p14:creationId xmlns:p14="http://schemas.microsoft.com/office/powerpoint/2010/main" val="3172980799"/>
+        <p14:creationId xmlns:p14="http://schemas.microsoft.com/office/powerpoint/2010/main" val="1204570886"/>
       </p:ext>
     </p:extLst>
   </p:cSld>
@@ -354,7 +354,7 @@
           <p:cNvPr id="2" name="タイトル 1">
             <a:extLst>
               <a:ext uri="{FF2B5EF4-FFF2-40B4-BE49-F238E27FC236}">
-                <a16:creationId xmlns:a16="http://schemas.microsoft.com/office/drawing/2014/main" id="{8AA0C758-EE5C-4B66-A0AF-0CCCE48F3C95}"/>
+                <a16:creationId xmlns:a16="http://schemas.microsoft.com/office/drawing/2014/main" id="{F0CE20D0-F63C-F469-7009-155EB76C7C58}"/>
               </a:ext>
             </a:extLst>
           </p:cNvPr>
@@ -382,7 +382,7 @@
           <p:cNvPr id="3" name="縦書きテキスト プレースホルダー 2">
             <a:extLst>
               <a:ext uri="{FF2B5EF4-FFF2-40B4-BE49-F238E27FC236}">
-                <a16:creationId xmlns:a16="http://schemas.microsoft.com/office/drawing/2014/main" id="{EDEFC058-6CB6-3B41-AF72-36DA3D6C33D7}"/>
+                <a16:creationId xmlns:a16="http://schemas.microsoft.com/office/drawing/2014/main" id="{8729D805-AF42-C6E8-9483-A1C13E426281}"/>
               </a:ext>
             </a:extLst>
           </p:cNvPr>
@@ -471,7 +471,7 @@
           <p:cNvPr id="4" name="日付プレースホルダー 3">
             <a:extLst>
               <a:ext uri="{FF2B5EF4-FFF2-40B4-BE49-F238E27FC236}">
-                <a16:creationId xmlns:a16="http://schemas.microsoft.com/office/drawing/2014/main" id="{A619E307-B085-9803-A96B-8BAB9C61E36D}"/>
+                <a16:creationId xmlns:a16="http://schemas.microsoft.com/office/drawing/2014/main" id="{420F317C-8ECA-7738-D26A-7DE2A650F655}"/>
               </a:ext>
             </a:extLst>
           </p:cNvPr>
@@ -487,7 +487,7 @@
           <a:bodyPr/>
           <a:lstStyle/>
           <a:p>
-            <a:fld id="{4347556D-961C-42B8-9381-BED9000E7EAE}" type="datetimeFigureOut">
+            <a:fld id="{5112284A-C95D-47F3-91B2-D34146ECB8CF}" type="datetimeFigureOut">
               <a:rPr kumimoji="1" lang="ja-JP" altLang="en-US" smtClean="0"/>
               <a:t>2026/7/30</a:t>
             </a:fld>
@@ -500,7 +500,7 @@
           <p:cNvPr id="5" name="フッター プレースホルダー 4">
             <a:extLst>
               <a:ext uri="{FF2B5EF4-FFF2-40B4-BE49-F238E27FC236}">
-                <a16:creationId xmlns:a16="http://schemas.microsoft.com/office/drawing/2014/main" id="{96C6B24A-BFB8-DB99-3F37-F525D4E01B74}"/>
+                <a16:creationId xmlns:a16="http://schemas.microsoft.com/office/drawing/2014/main" id="{B7E57C53-65A9-7BF9-C391-13C4B5E5E8EF}"/>
               </a:ext>
             </a:extLst>
           </p:cNvPr>
@@ -525,7 +525,7 @@
           <p:cNvPr id="6" name="スライド番号プレースホルダー 5">
             <a:extLst>
               <a:ext uri="{FF2B5EF4-FFF2-40B4-BE49-F238E27FC236}">
-                <a16:creationId xmlns:a16="http://schemas.microsoft.com/office/drawing/2014/main" id="{98E3F395-3552-4751-22E4-2DAFB5CAB355}"/>
+                <a16:creationId xmlns:a16="http://schemas.microsoft.com/office/drawing/2014/main" id="{97C28F89-FB14-6C9B-C06D-AAAA53E1873A}"/>
               </a:ext>
             </a:extLst>
           </p:cNvPr>
@@ -541,7 +541,7 @@
           <a:bodyPr/>
           <a:lstStyle/>
           <a:p>
-            <a:fld id="{A880647F-F25E-4D2A-87A2-702BADF422CB}" type="slidenum">
+            <a:fld id="{C23EBC2A-0C05-4802-9AAF-93E32E64FFA0}" type="slidenum">
               <a:rPr kumimoji="1" lang="ja-JP" altLang="en-US" smtClean="0"/>
               <a:t>‹#›</a:t>
             </a:fld>
@@ -552,7 +552,7 @@
     </p:spTree>
     <p:extLst>
       <p:ext uri="{BB962C8B-B14F-4D97-AF65-F5344CB8AC3E}">
-        <p14:creationId xmlns:p14="http://schemas.microsoft.com/office/powerpoint/2010/main" val="1724720684"/>
+        <p14:creationId xmlns:p14="http://schemas.microsoft.com/office/powerpoint/2010/main" val="3718852183"/>
       </p:ext>
     </p:extLst>
   </p:cSld>
@@ -584,7 +584,7 @@
           <p:cNvPr id="2" name="縦書きタイトル 1">
             <a:extLst>
               <a:ext uri="{FF2B5EF4-FFF2-40B4-BE49-F238E27FC236}">
-                <a16:creationId xmlns:a16="http://schemas.microsoft.com/office/drawing/2014/main" id="{22BA5940-193F-DB3D-406F-005A936164E4}"/>
+                <a16:creationId xmlns:a16="http://schemas.microsoft.com/office/drawing/2014/main" id="{6DDA2526-8F2D-D9B0-2584-9E0211150697}"/>
               </a:ext>
             </a:extLst>
           </p:cNvPr>
@@ -617,7 +617,7 @@
           <p:cNvPr id="3" name="縦書きテキスト プレースホルダー 2">
             <a:extLst>
               <a:ext uri="{FF2B5EF4-FFF2-40B4-BE49-F238E27FC236}">
-                <a16:creationId xmlns:a16="http://schemas.microsoft.com/office/drawing/2014/main" id="{C9A60358-68E4-8353-1077-30366A41285D}"/>
+                <a16:creationId xmlns:a16="http://schemas.microsoft.com/office/drawing/2014/main" id="{9ECACC4E-4008-9DA5-EC14-EE083395620F}"/>
               </a:ext>
             </a:extLst>
           </p:cNvPr>
@@ -711,7 +711,7 @@
           <p:cNvPr id="4" name="日付プレースホルダー 3">
             <a:extLst>
               <a:ext uri="{FF2B5EF4-FFF2-40B4-BE49-F238E27FC236}">
-                <a16:creationId xmlns:a16="http://schemas.microsoft.com/office/drawing/2014/main" id="{F490F24C-E3A6-8683-1F3F-A5900B1FB49D}"/>
+                <a16:creationId xmlns:a16="http://schemas.microsoft.com/office/drawing/2014/main" id="{CED73BD5-C480-6E50-DFBD-5E8B264A7319}"/>
               </a:ext>
             </a:extLst>
           </p:cNvPr>
@@ -727,7 +727,7 @@
           <a:bodyPr/>
           <a:lstStyle/>
           <a:p>
-            <a:fld id="{4347556D-961C-42B8-9381-BED9000E7EAE}" type="datetimeFigureOut">
+            <a:fld id="{5112284A-C95D-47F3-91B2-D34146ECB8CF}" type="datetimeFigureOut">
               <a:rPr kumimoji="1" lang="ja-JP" altLang="en-US" smtClean="0"/>
               <a:t>2026/7/30</a:t>
             </a:fld>
@@ -740,7 +740,7 @@
           <p:cNvPr id="5" name="フッター プレースホルダー 4">
             <a:extLst>
               <a:ext uri="{FF2B5EF4-FFF2-40B4-BE49-F238E27FC236}">
-                <a16:creationId xmlns:a16="http://schemas.microsoft.com/office/drawing/2014/main" id="{CC37EA73-465A-1282-977F-85025333B7CC}"/>
+                <a16:creationId xmlns:a16="http://schemas.microsoft.com/office/drawing/2014/main" id="{14ADC4F5-B2B5-760A-95D1-6E8EA0E1315A}"/>
               </a:ext>
             </a:extLst>
           </p:cNvPr>
@@ -765,7 +765,7 @@
           <p:cNvPr id="6" name="スライド番号プレースホルダー 5">
             <a:extLst>
               <a:ext uri="{FF2B5EF4-FFF2-40B4-BE49-F238E27FC236}">
-                <a16:creationId xmlns:a16="http://schemas.microsoft.com/office/drawing/2014/main" id="{CF413D06-233C-9368-8215-6D7146E10274}"/>
+                <a16:creationId xmlns:a16="http://schemas.microsoft.com/office/drawing/2014/main" id="{021D5BF0-72D1-D5D5-F829-373873BC631B}"/>
               </a:ext>
             </a:extLst>
           </p:cNvPr>
@@ -781,7 +781,7 @@
           <a:bodyPr/>
           <a:lstStyle/>
           <a:p>
-            <a:fld id="{A880647F-F25E-4D2A-87A2-702BADF422CB}" type="slidenum">
+            <a:fld id="{C23EBC2A-0C05-4802-9AAF-93E32E64FFA0}" type="slidenum">
               <a:rPr kumimoji="1" lang="ja-JP" altLang="en-US" smtClean="0"/>
               <a:t>‹#›</a:t>
             </a:fld>
@@ -792,7 +792,7 @@
     </p:spTree>
     <p:extLst>
       <p:ext uri="{BB962C8B-B14F-4D97-AF65-F5344CB8AC3E}">
-        <p14:creationId xmlns:p14="http://schemas.microsoft.com/office/powerpoint/2010/main" val="3201276820"/>
+        <p14:creationId xmlns:p14="http://schemas.microsoft.com/office/powerpoint/2010/main" val="406871062"/>
       </p:ext>
     </p:extLst>
   </p:cSld>
@@ -824,7 +824,7 @@
           <p:cNvPr id="2" name="タイトル 1">
             <a:extLst>
               <a:ext uri="{FF2B5EF4-FFF2-40B4-BE49-F238E27FC236}">
-                <a16:creationId xmlns:a16="http://schemas.microsoft.com/office/drawing/2014/main" id="{393CC04F-6562-1052-5338-FED76242A603}"/>
+                <a16:creationId xmlns:a16="http://schemas.microsoft.com/office/drawing/2014/main" id="{DF7B5809-7F81-D7BE-491D-69EA9289C4B0}"/>
               </a:ext>
             </a:extLst>
           </p:cNvPr>
@@ -852,7 +852,7 @@
           <p:cNvPr id="3" name="コンテンツ プレースホルダー 2">
             <a:extLst>
               <a:ext uri="{FF2B5EF4-FFF2-40B4-BE49-F238E27FC236}">
-                <a16:creationId xmlns:a16="http://schemas.microsoft.com/office/drawing/2014/main" id="{77A5FB8C-F478-3DD2-B511-3E86ADDCDFA4}"/>
+                <a16:creationId xmlns:a16="http://schemas.microsoft.com/office/drawing/2014/main" id="{42CC1F9D-6835-114E-AD60-5D9F355C5A58}"/>
               </a:ext>
             </a:extLst>
           </p:cNvPr>
@@ -941,7 +941,7 @@
           <p:cNvPr id="4" name="日付プレースホルダー 3">
             <a:extLst>
               <a:ext uri="{FF2B5EF4-FFF2-40B4-BE49-F238E27FC236}">
-                <a16:creationId xmlns:a16="http://schemas.microsoft.com/office/drawing/2014/main" id="{796A1C98-B166-91BE-473C-DE1C4FF0CE4D}"/>
+                <a16:creationId xmlns:a16="http://schemas.microsoft.com/office/drawing/2014/main" id="{14EE1C17-1ED0-4F8A-1BD2-B8E28F74A490}"/>
               </a:ext>
             </a:extLst>
           </p:cNvPr>
@@ -957,7 +957,7 @@
           <a:bodyPr/>
           <a:lstStyle/>
           <a:p>
-            <a:fld id="{4347556D-961C-42B8-9381-BED9000E7EAE}" type="datetimeFigureOut">
+            <a:fld id="{5112284A-C95D-47F3-91B2-D34146ECB8CF}" type="datetimeFigureOut">
               <a:rPr kumimoji="1" lang="ja-JP" altLang="en-US" smtClean="0"/>
               <a:t>2026/7/30</a:t>
             </a:fld>
@@ -970,7 +970,7 @@
           <p:cNvPr id="5" name="フッター プレースホルダー 4">
             <a:extLst>
               <a:ext uri="{FF2B5EF4-FFF2-40B4-BE49-F238E27FC236}">
-                <a16:creationId xmlns:a16="http://schemas.microsoft.com/office/drawing/2014/main" id="{14CD7D42-2CF7-1AA8-CAC9-ADD9CA406D2A}"/>
+                <a16:creationId xmlns:a16="http://schemas.microsoft.com/office/drawing/2014/main" id="{413CA0DD-0344-9AAE-7B63-DF156F0FF3BD}"/>
               </a:ext>
             </a:extLst>
           </p:cNvPr>
@@ -995,7 +995,7 @@
           <p:cNvPr id="6" name="スライド番号プレースホルダー 5">
             <a:extLst>
               <a:ext uri="{FF2B5EF4-FFF2-40B4-BE49-F238E27FC236}">
-                <a16:creationId xmlns:a16="http://schemas.microsoft.com/office/drawing/2014/main" id="{F7BA8187-FD1E-944C-0359-C406239936F2}"/>
+                <a16:creationId xmlns:a16="http://schemas.microsoft.com/office/drawing/2014/main" id="{AD2B1D66-0046-126C-3233-39A01974922D}"/>
               </a:ext>
             </a:extLst>
           </p:cNvPr>
@@ -1011,7 +1011,7 @@
           <a:bodyPr/>
           <a:lstStyle/>
           <a:p>
-            <a:fld id="{A880647F-F25E-4D2A-87A2-702BADF422CB}" type="slidenum">
+            <a:fld id="{C23EBC2A-0C05-4802-9AAF-93E32E64FFA0}" type="slidenum">
               <a:rPr kumimoji="1" lang="ja-JP" altLang="en-US" smtClean="0"/>
               <a:t>‹#›</a:t>
             </a:fld>
@@ -1022,7 +1022,7 @@
     </p:spTree>
     <p:extLst>
       <p:ext uri="{BB962C8B-B14F-4D97-AF65-F5344CB8AC3E}">
-        <p14:creationId xmlns:p14="http://schemas.microsoft.com/office/powerpoint/2010/main" val="1898453707"/>
+        <p14:creationId xmlns:p14="http://schemas.microsoft.com/office/powerpoint/2010/main" val="19075354"/>
       </p:ext>
     </p:extLst>
   </p:cSld>
@@ -1054,7 +1054,7 @@
           <p:cNvPr id="2" name="タイトル 1">
             <a:extLst>
               <a:ext uri="{FF2B5EF4-FFF2-40B4-BE49-F238E27FC236}">
-                <a16:creationId xmlns:a16="http://schemas.microsoft.com/office/drawing/2014/main" id="{274AE01F-8130-8393-1750-3B0CABD2F9B4}"/>
+                <a16:creationId xmlns:a16="http://schemas.microsoft.com/office/drawing/2014/main" id="{54211DCF-8553-79A3-A442-5B7C20D3D3D8}"/>
               </a:ext>
             </a:extLst>
           </p:cNvPr>
@@ -1091,7 +1091,7 @@
           <p:cNvPr id="3" name="テキスト プレースホルダー 2">
             <a:extLst>
               <a:ext uri="{FF2B5EF4-FFF2-40B4-BE49-F238E27FC236}">
-                <a16:creationId xmlns:a16="http://schemas.microsoft.com/office/drawing/2014/main" id="{BC2CD6F7-3B7F-341A-395F-9CBE33142299}"/>
+                <a16:creationId xmlns:a16="http://schemas.microsoft.com/office/drawing/2014/main" id="{CD758655-0E03-BFCC-2585-49EA0F4A963F}"/>
               </a:ext>
             </a:extLst>
           </p:cNvPr>
@@ -1216,7 +1216,7 @@
           <p:cNvPr id="4" name="日付プレースホルダー 3">
             <a:extLst>
               <a:ext uri="{FF2B5EF4-FFF2-40B4-BE49-F238E27FC236}">
-                <a16:creationId xmlns:a16="http://schemas.microsoft.com/office/drawing/2014/main" id="{3552B09C-7B7F-4B4E-BCFB-667AAA090AB3}"/>
+                <a16:creationId xmlns:a16="http://schemas.microsoft.com/office/drawing/2014/main" id="{3EEC992C-8355-2368-0712-4B9A74320489}"/>
               </a:ext>
             </a:extLst>
           </p:cNvPr>
@@ -1232,7 +1232,7 @@
           <a:bodyPr/>
           <a:lstStyle/>
           <a:p>
-            <a:fld id="{4347556D-961C-42B8-9381-BED9000E7EAE}" type="datetimeFigureOut">
+            <a:fld id="{5112284A-C95D-47F3-91B2-D34146ECB8CF}" type="datetimeFigureOut">
               <a:rPr kumimoji="1" lang="ja-JP" altLang="en-US" smtClean="0"/>
               <a:t>2026/7/30</a:t>
             </a:fld>
@@ -1245,7 +1245,7 @@
           <p:cNvPr id="5" name="フッター プレースホルダー 4">
             <a:extLst>
               <a:ext uri="{FF2B5EF4-FFF2-40B4-BE49-F238E27FC236}">
-                <a16:creationId xmlns:a16="http://schemas.microsoft.com/office/drawing/2014/main" id="{C9962417-7506-F1D3-A2AC-355CDD60B8AA}"/>
+                <a16:creationId xmlns:a16="http://schemas.microsoft.com/office/drawing/2014/main" id="{F5DF447C-5187-0D31-0E05-CDEEEA36BA8E}"/>
               </a:ext>
             </a:extLst>
           </p:cNvPr>
@@ -1270,7 +1270,7 @@
           <p:cNvPr id="6" name="スライド番号プレースホルダー 5">
             <a:extLst>
               <a:ext uri="{FF2B5EF4-FFF2-40B4-BE49-F238E27FC236}">
-                <a16:creationId xmlns:a16="http://schemas.microsoft.com/office/drawing/2014/main" id="{E44F4D58-7E2F-DB32-B679-80D3E4897A64}"/>
+                <a16:creationId xmlns:a16="http://schemas.microsoft.com/office/drawing/2014/main" id="{E640BA6F-4B02-9312-6CEE-7D30678F9810}"/>
               </a:ext>
             </a:extLst>
           </p:cNvPr>
@@ -1286,7 +1286,7 @@
           <a:bodyPr/>
           <a:lstStyle/>
           <a:p>
-            <a:fld id="{A880647F-F25E-4D2A-87A2-702BADF422CB}" type="slidenum">
+            <a:fld id="{C23EBC2A-0C05-4802-9AAF-93E32E64FFA0}" type="slidenum">
               <a:rPr kumimoji="1" lang="ja-JP" altLang="en-US" smtClean="0"/>
               <a:t>‹#›</a:t>
             </a:fld>
@@ -1297,7 +1297,7 @@
     </p:spTree>
     <p:extLst>
       <p:ext uri="{BB962C8B-B14F-4D97-AF65-F5344CB8AC3E}">
-        <p14:creationId xmlns:p14="http://schemas.microsoft.com/office/powerpoint/2010/main" val="1714161108"/>
+        <p14:creationId xmlns:p14="http://schemas.microsoft.com/office/powerpoint/2010/main" val="2377691075"/>
       </p:ext>
     </p:extLst>
   </p:cSld>
@@ -1329,7 +1329,7 @@
           <p:cNvPr id="2" name="タイトル 1">
             <a:extLst>
               <a:ext uri="{FF2B5EF4-FFF2-40B4-BE49-F238E27FC236}">
-                <a16:creationId xmlns:a16="http://schemas.microsoft.com/office/drawing/2014/main" id="{370A3F5B-9471-6844-E25D-7EF573EA7D0B}"/>
+                <a16:creationId xmlns:a16="http://schemas.microsoft.com/office/drawing/2014/main" id="{896DA405-0F5C-CC58-FE33-DE9B1EA1A23C}"/>
               </a:ext>
             </a:extLst>
           </p:cNvPr>
@@ -1357,7 +1357,7 @@
           <p:cNvPr id="3" name="コンテンツ プレースホルダー 2">
             <a:extLst>
               <a:ext uri="{FF2B5EF4-FFF2-40B4-BE49-F238E27FC236}">
-                <a16:creationId xmlns:a16="http://schemas.microsoft.com/office/drawing/2014/main" id="{6DBB1D5B-2FB0-3F43-3A13-E0620F72AD85}"/>
+                <a16:creationId xmlns:a16="http://schemas.microsoft.com/office/drawing/2014/main" id="{935A9F15-3BD5-3F7E-0FA9-2F4A361AFDFD}"/>
               </a:ext>
             </a:extLst>
           </p:cNvPr>
@@ -1451,7 +1451,7 @@
           <p:cNvPr id="4" name="コンテンツ プレースホルダー 3">
             <a:extLst>
               <a:ext uri="{FF2B5EF4-FFF2-40B4-BE49-F238E27FC236}">
-                <a16:creationId xmlns:a16="http://schemas.microsoft.com/office/drawing/2014/main" id="{F740C52A-75AB-0AC2-3E56-45B72C88B1AF}"/>
+                <a16:creationId xmlns:a16="http://schemas.microsoft.com/office/drawing/2014/main" id="{1119646B-8906-6215-0007-33006D40F697}"/>
               </a:ext>
             </a:extLst>
           </p:cNvPr>
@@ -1545,7 +1545,7 @@
           <p:cNvPr id="5" name="日付プレースホルダー 4">
             <a:extLst>
               <a:ext uri="{FF2B5EF4-FFF2-40B4-BE49-F238E27FC236}">
-                <a16:creationId xmlns:a16="http://schemas.microsoft.com/office/drawing/2014/main" id="{F8477DC7-39CD-140F-AE07-A8F26519F675}"/>
+                <a16:creationId xmlns:a16="http://schemas.microsoft.com/office/drawing/2014/main" id="{7287B06F-0C1D-C139-D2BC-1CAB672C290E}"/>
               </a:ext>
             </a:extLst>
           </p:cNvPr>
@@ -1561,7 +1561,7 @@
           <a:bodyPr/>
           <a:lstStyle/>
           <a:p>
-            <a:fld id="{4347556D-961C-42B8-9381-BED9000E7EAE}" type="datetimeFigureOut">
+            <a:fld id="{5112284A-C95D-47F3-91B2-D34146ECB8CF}" type="datetimeFigureOut">
               <a:rPr kumimoji="1" lang="ja-JP" altLang="en-US" smtClean="0"/>
               <a:t>2026/7/30</a:t>
             </a:fld>
@@ -1574,7 +1574,7 @@
           <p:cNvPr id="6" name="フッター プレースホルダー 5">
             <a:extLst>
               <a:ext uri="{FF2B5EF4-FFF2-40B4-BE49-F238E27FC236}">
-                <a16:creationId xmlns:a16="http://schemas.microsoft.com/office/drawing/2014/main" id="{858075E4-F9B7-1E5F-73C3-D767C9E0EFC6}"/>
+                <a16:creationId xmlns:a16="http://schemas.microsoft.com/office/drawing/2014/main" id="{7F29F483-1903-EEEA-CEF2-00E38E3D4E8F}"/>
               </a:ext>
             </a:extLst>
           </p:cNvPr>
@@ -1599,7 +1599,7 @@
           <p:cNvPr id="7" name="スライド番号プレースホルダー 6">
             <a:extLst>
               <a:ext uri="{FF2B5EF4-FFF2-40B4-BE49-F238E27FC236}">
-                <a16:creationId xmlns:a16="http://schemas.microsoft.com/office/drawing/2014/main" id="{5235EA66-0E85-A7D1-2C5D-63765741A607}"/>
+                <a16:creationId xmlns:a16="http://schemas.microsoft.com/office/drawing/2014/main" id="{AAA9255E-1945-E9EA-6EEF-44F9CAED157D}"/>
               </a:ext>
             </a:extLst>
           </p:cNvPr>
@@ -1615,7 +1615,7 @@
           <a:bodyPr/>
           <a:lstStyle/>
           <a:p>
-            <a:fld id="{A880647F-F25E-4D2A-87A2-702BADF422CB}" type="slidenum">
+            <a:fld id="{C23EBC2A-0C05-4802-9AAF-93E32E64FFA0}" type="slidenum">
               <a:rPr kumimoji="1" lang="ja-JP" altLang="en-US" smtClean="0"/>
               <a:t>‹#›</a:t>
             </a:fld>
@@ -1626,7 +1626,7 @@
     </p:spTree>
     <p:extLst>
       <p:ext uri="{BB962C8B-B14F-4D97-AF65-F5344CB8AC3E}">
-        <p14:creationId xmlns:p14="http://schemas.microsoft.com/office/powerpoint/2010/main" val="1366714394"/>
+        <p14:creationId xmlns:p14="http://schemas.microsoft.com/office/powerpoint/2010/main" val="1822655708"/>
       </p:ext>
     </p:extLst>
   </p:cSld>
@@ -1658,7 +1658,7 @@
           <p:cNvPr id="2" name="タイトル 1">
             <a:extLst>
               <a:ext uri="{FF2B5EF4-FFF2-40B4-BE49-F238E27FC236}">
-                <a16:creationId xmlns:a16="http://schemas.microsoft.com/office/drawing/2014/main" id="{E81B2DAC-4D25-C3DB-0DC3-67330A784F5D}"/>
+                <a16:creationId xmlns:a16="http://schemas.microsoft.com/office/drawing/2014/main" id="{E98A6CFE-B77C-9B76-2FD1-F6BBA0859BFF}"/>
               </a:ext>
             </a:extLst>
           </p:cNvPr>
@@ -1691,7 +1691,7 @@
           <p:cNvPr id="3" name="テキスト プレースホルダー 2">
             <a:extLst>
               <a:ext uri="{FF2B5EF4-FFF2-40B4-BE49-F238E27FC236}">
-                <a16:creationId xmlns:a16="http://schemas.microsoft.com/office/drawing/2014/main" id="{9AB01B39-33CA-0B26-15A3-36D5F3D021E5}"/>
+                <a16:creationId xmlns:a16="http://schemas.microsoft.com/office/drawing/2014/main" id="{BE91D86C-92A7-E9FE-2590-71E8A07F9320}"/>
               </a:ext>
             </a:extLst>
           </p:cNvPr>
@@ -1762,7 +1762,7 @@
           <p:cNvPr id="4" name="コンテンツ プレースホルダー 3">
             <a:extLst>
               <a:ext uri="{FF2B5EF4-FFF2-40B4-BE49-F238E27FC236}">
-                <a16:creationId xmlns:a16="http://schemas.microsoft.com/office/drawing/2014/main" id="{279711F2-60AB-86A3-3767-5E4A659998E1}"/>
+                <a16:creationId xmlns:a16="http://schemas.microsoft.com/office/drawing/2014/main" id="{5D3AA3E5-0665-0106-13ED-F12D8D307BF1}"/>
               </a:ext>
             </a:extLst>
           </p:cNvPr>
@@ -1856,7 +1856,7 @@
           <p:cNvPr id="5" name="テキスト プレースホルダー 4">
             <a:extLst>
               <a:ext uri="{FF2B5EF4-FFF2-40B4-BE49-F238E27FC236}">
-                <a16:creationId xmlns:a16="http://schemas.microsoft.com/office/drawing/2014/main" id="{CA1949E2-0E04-D7F2-7305-C778A1EFDD27}"/>
+                <a16:creationId xmlns:a16="http://schemas.microsoft.com/office/drawing/2014/main" id="{A259E8CC-AB0C-7ACD-94E8-49C871DF7330}"/>
               </a:ext>
             </a:extLst>
           </p:cNvPr>
@@ -1927,7 +1927,7 @@
           <p:cNvPr id="6" name="コンテンツ プレースホルダー 5">
             <a:extLst>
               <a:ext uri="{FF2B5EF4-FFF2-40B4-BE49-F238E27FC236}">
-                <a16:creationId xmlns:a16="http://schemas.microsoft.com/office/drawing/2014/main" id="{94C621AC-D60A-0752-3FE3-BD754017CA8A}"/>
+                <a16:creationId xmlns:a16="http://schemas.microsoft.com/office/drawing/2014/main" id="{D11DFFDF-EF2A-FA91-2F41-30CC9A59815E}"/>
               </a:ext>
             </a:extLst>
           </p:cNvPr>
@@ -2021,7 +2021,7 @@
           <p:cNvPr id="7" name="日付プレースホルダー 6">
             <a:extLst>
               <a:ext uri="{FF2B5EF4-FFF2-40B4-BE49-F238E27FC236}">
-                <a16:creationId xmlns:a16="http://schemas.microsoft.com/office/drawing/2014/main" id="{E48F9CDE-C45B-7F4F-95B3-D8F17F74D918}"/>
+                <a16:creationId xmlns:a16="http://schemas.microsoft.com/office/drawing/2014/main" id="{1CF1601C-B924-C217-A400-5F98B39B6C34}"/>
               </a:ext>
             </a:extLst>
           </p:cNvPr>
@@ -2037,7 +2037,7 @@
           <a:bodyPr/>
           <a:lstStyle/>
           <a:p>
-            <a:fld id="{4347556D-961C-42B8-9381-BED9000E7EAE}" type="datetimeFigureOut">
+            <a:fld id="{5112284A-C95D-47F3-91B2-D34146ECB8CF}" type="datetimeFigureOut">
               <a:rPr kumimoji="1" lang="ja-JP" altLang="en-US" smtClean="0"/>
               <a:t>2026/7/30</a:t>
             </a:fld>
@@ -2050,7 +2050,7 @@
           <p:cNvPr id="8" name="フッター プレースホルダー 7">
             <a:extLst>
               <a:ext uri="{FF2B5EF4-FFF2-40B4-BE49-F238E27FC236}">
-                <a16:creationId xmlns:a16="http://schemas.microsoft.com/office/drawing/2014/main" id="{2203BB84-6FAB-99A5-4433-3E00EF3D3165}"/>
+                <a16:creationId xmlns:a16="http://schemas.microsoft.com/office/drawing/2014/main" id="{5D41F1AD-BFC3-3980-6D5C-DACBEE48DCE2}"/>
               </a:ext>
             </a:extLst>
           </p:cNvPr>
@@ -2075,7 +2075,7 @@
           <p:cNvPr id="9" name="スライド番号プレースホルダー 8">
             <a:extLst>
               <a:ext uri="{FF2B5EF4-FFF2-40B4-BE49-F238E27FC236}">
-                <a16:creationId xmlns:a16="http://schemas.microsoft.com/office/drawing/2014/main" id="{07DF8D53-F66F-BA49-09F4-B719F5CEC1C5}"/>
+                <a16:creationId xmlns:a16="http://schemas.microsoft.com/office/drawing/2014/main" id="{13A9612C-5915-C345-EDAA-CD2DE838FBBB}"/>
               </a:ext>
             </a:extLst>
           </p:cNvPr>
@@ -2091,7 +2091,7 @@
           <a:bodyPr/>
           <a:lstStyle/>
           <a:p>
-            <a:fld id="{A880647F-F25E-4D2A-87A2-702BADF422CB}" type="slidenum">
+            <a:fld id="{C23EBC2A-0C05-4802-9AAF-93E32E64FFA0}" type="slidenum">
               <a:rPr kumimoji="1" lang="ja-JP" altLang="en-US" smtClean="0"/>
               <a:t>‹#›</a:t>
             </a:fld>
@@ -2102,7 +2102,7 @@
     </p:spTree>
     <p:extLst>
       <p:ext uri="{BB962C8B-B14F-4D97-AF65-F5344CB8AC3E}">
-        <p14:creationId xmlns:p14="http://schemas.microsoft.com/office/powerpoint/2010/main" val="951999851"/>
+        <p14:creationId xmlns:p14="http://schemas.microsoft.com/office/powerpoint/2010/main" val="1903718423"/>
       </p:ext>
     </p:extLst>
   </p:cSld>
@@ -2134,7 +2134,7 @@
           <p:cNvPr id="2" name="タイトル 1">
             <a:extLst>
               <a:ext uri="{FF2B5EF4-FFF2-40B4-BE49-F238E27FC236}">
-                <a16:creationId xmlns:a16="http://schemas.microsoft.com/office/drawing/2014/main" id="{D992B9C0-F334-A38C-0F0C-339A51E0ACFD}"/>
+                <a16:creationId xmlns:a16="http://schemas.microsoft.com/office/drawing/2014/main" id="{93C4D33D-1F50-798B-5BB5-75BD0EF6A3FF}"/>
               </a:ext>
             </a:extLst>
           </p:cNvPr>
@@ -2162,7 +2162,7 @@
           <p:cNvPr id="3" name="日付プレースホルダー 2">
             <a:extLst>
               <a:ext uri="{FF2B5EF4-FFF2-40B4-BE49-F238E27FC236}">
-                <a16:creationId xmlns:a16="http://schemas.microsoft.com/office/drawing/2014/main" id="{20A5B076-954C-57F3-986D-93E1E8490ADC}"/>
+                <a16:creationId xmlns:a16="http://schemas.microsoft.com/office/drawing/2014/main" id="{7CC25913-B4C9-692C-31A8-C80359A0749E}"/>
               </a:ext>
             </a:extLst>
           </p:cNvPr>
@@ -2178,7 +2178,7 @@
           <a:bodyPr/>
           <a:lstStyle/>
           <a:p>
-            <a:fld id="{4347556D-961C-42B8-9381-BED9000E7EAE}" type="datetimeFigureOut">
+            <a:fld id="{5112284A-C95D-47F3-91B2-D34146ECB8CF}" type="datetimeFigureOut">
               <a:rPr kumimoji="1" lang="ja-JP" altLang="en-US" smtClean="0"/>
               <a:t>2026/7/30</a:t>
             </a:fld>
@@ -2191,7 +2191,7 @@
           <p:cNvPr id="4" name="フッター プレースホルダー 3">
             <a:extLst>
               <a:ext uri="{FF2B5EF4-FFF2-40B4-BE49-F238E27FC236}">
-                <a16:creationId xmlns:a16="http://schemas.microsoft.com/office/drawing/2014/main" id="{D21DC297-9316-2FDC-2A85-15FFA193B1B3}"/>
+                <a16:creationId xmlns:a16="http://schemas.microsoft.com/office/drawing/2014/main" id="{9E1DAE07-0D6B-E7DF-E155-51C38BD4E992}"/>
               </a:ext>
             </a:extLst>
           </p:cNvPr>
@@ -2216,7 +2216,7 @@
           <p:cNvPr id="5" name="スライド番号プレースホルダー 4">
             <a:extLst>
               <a:ext uri="{FF2B5EF4-FFF2-40B4-BE49-F238E27FC236}">
-                <a16:creationId xmlns:a16="http://schemas.microsoft.com/office/drawing/2014/main" id="{50BCD488-E00F-92D6-6431-C2A647012C8B}"/>
+                <a16:creationId xmlns:a16="http://schemas.microsoft.com/office/drawing/2014/main" id="{9A5518B1-D274-876F-FEF6-20920F866C98}"/>
               </a:ext>
             </a:extLst>
           </p:cNvPr>
@@ -2232,7 +2232,7 @@
           <a:bodyPr/>
           <a:lstStyle/>
           <a:p>
-            <a:fld id="{A880647F-F25E-4D2A-87A2-702BADF422CB}" type="slidenum">
+            <a:fld id="{C23EBC2A-0C05-4802-9AAF-93E32E64FFA0}" type="slidenum">
               <a:rPr kumimoji="1" lang="ja-JP" altLang="en-US" smtClean="0"/>
               <a:t>‹#›</a:t>
             </a:fld>
@@ -2243,7 +2243,7 @@
     </p:spTree>
     <p:extLst>
       <p:ext uri="{BB962C8B-B14F-4D97-AF65-F5344CB8AC3E}">
-        <p14:creationId xmlns:p14="http://schemas.microsoft.com/office/powerpoint/2010/main" val="1694161816"/>
+        <p14:creationId xmlns:p14="http://schemas.microsoft.com/office/powerpoint/2010/main" val="3815909621"/>
       </p:ext>
     </p:extLst>
   </p:cSld>
@@ -2275,7 +2275,7 @@
           <p:cNvPr id="2" name="日付プレースホルダー 1">
             <a:extLst>
               <a:ext uri="{FF2B5EF4-FFF2-40B4-BE49-F238E27FC236}">
-                <a16:creationId xmlns:a16="http://schemas.microsoft.com/office/drawing/2014/main" id="{DD378ACC-3253-C519-415E-718C22CD87D1}"/>
+                <a16:creationId xmlns:a16="http://schemas.microsoft.com/office/drawing/2014/main" id="{63675072-861A-586E-2A74-20EADAF6B1E9}"/>
               </a:ext>
             </a:extLst>
           </p:cNvPr>
@@ -2291,7 +2291,7 @@
           <a:bodyPr/>
           <a:lstStyle/>
           <a:p>
-            <a:fld id="{4347556D-961C-42B8-9381-BED9000E7EAE}" type="datetimeFigureOut">
+            <a:fld id="{5112284A-C95D-47F3-91B2-D34146ECB8CF}" type="datetimeFigureOut">
               <a:rPr kumimoji="1" lang="ja-JP" altLang="en-US" smtClean="0"/>
               <a:t>2026/7/30</a:t>
             </a:fld>
@@ -2304,7 +2304,7 @@
           <p:cNvPr id="3" name="フッター プレースホルダー 2">
             <a:extLst>
               <a:ext uri="{FF2B5EF4-FFF2-40B4-BE49-F238E27FC236}">
-                <a16:creationId xmlns:a16="http://schemas.microsoft.com/office/drawing/2014/main" id="{FA55C278-42F1-58A5-922D-CFA20FF5C849}"/>
+                <a16:creationId xmlns:a16="http://schemas.microsoft.com/office/drawing/2014/main" id="{F500ECC4-08E6-ECA3-39A4-40C70C207C93}"/>
               </a:ext>
             </a:extLst>
           </p:cNvPr>
@@ -2329,7 +2329,7 @@
           <p:cNvPr id="4" name="スライド番号プレースホルダー 3">
             <a:extLst>
               <a:ext uri="{FF2B5EF4-FFF2-40B4-BE49-F238E27FC236}">
-                <a16:creationId xmlns:a16="http://schemas.microsoft.com/office/drawing/2014/main" id="{C5940E3F-98FC-95F8-FAF5-1057942D5A84}"/>
+                <a16:creationId xmlns:a16="http://schemas.microsoft.com/office/drawing/2014/main" id="{AE9397EF-14E7-FAD4-420C-DA7646974F6F}"/>
               </a:ext>
             </a:extLst>
           </p:cNvPr>
@@ -2345,7 +2345,7 @@
           <a:bodyPr/>
           <a:lstStyle/>
           <a:p>
-            <a:fld id="{A880647F-F25E-4D2A-87A2-702BADF422CB}" type="slidenum">
+            <a:fld id="{C23EBC2A-0C05-4802-9AAF-93E32E64FFA0}" type="slidenum">
               <a:rPr kumimoji="1" lang="ja-JP" altLang="en-US" smtClean="0"/>
               <a:t>‹#›</a:t>
             </a:fld>
@@ -2356,7 +2356,7 @@
     </p:spTree>
     <p:extLst>
       <p:ext uri="{BB962C8B-B14F-4D97-AF65-F5344CB8AC3E}">
-        <p14:creationId xmlns:p14="http://schemas.microsoft.com/office/powerpoint/2010/main" val="2614974894"/>
+        <p14:creationId xmlns:p14="http://schemas.microsoft.com/office/powerpoint/2010/main" val="35264068"/>
       </p:ext>
     </p:extLst>
   </p:cSld>
@@ -2388,7 +2388,7 @@
           <p:cNvPr id="2" name="タイトル 1">
             <a:extLst>
               <a:ext uri="{FF2B5EF4-FFF2-40B4-BE49-F238E27FC236}">
-                <a16:creationId xmlns:a16="http://schemas.microsoft.com/office/drawing/2014/main" id="{EACD888D-59A6-A457-41CC-A16B8400EAA2}"/>
+                <a16:creationId xmlns:a16="http://schemas.microsoft.com/office/drawing/2014/main" id="{E7844CEC-5CCE-073F-AD75-F46C48061660}"/>
               </a:ext>
             </a:extLst>
           </p:cNvPr>
@@ -2425,7 +2425,7 @@
           <p:cNvPr id="3" name="コンテンツ プレースホルダー 2">
             <a:extLst>
               <a:ext uri="{FF2B5EF4-FFF2-40B4-BE49-F238E27FC236}">
-                <a16:creationId xmlns:a16="http://schemas.microsoft.com/office/drawing/2014/main" id="{5ECC21F5-183E-3FA9-1F50-F7E32D054E2F}"/>
+                <a16:creationId xmlns:a16="http://schemas.microsoft.com/office/drawing/2014/main" id="{88B89692-7C8C-2D56-9026-F5DC59517DC7}"/>
               </a:ext>
             </a:extLst>
           </p:cNvPr>
@@ -2547,7 +2547,7 @@
           <p:cNvPr id="4" name="テキスト プレースホルダー 3">
             <a:extLst>
               <a:ext uri="{FF2B5EF4-FFF2-40B4-BE49-F238E27FC236}">
-                <a16:creationId xmlns:a16="http://schemas.microsoft.com/office/drawing/2014/main" id="{EE02C94C-A82C-B689-A778-C50057602CCD}"/>
+                <a16:creationId xmlns:a16="http://schemas.microsoft.com/office/drawing/2014/main" id="{531B65FA-E4E9-D910-6F20-A1E3EB3FFD8A}"/>
               </a:ext>
             </a:extLst>
           </p:cNvPr>
@@ -2618,7 +2618,7 @@
           <p:cNvPr id="5" name="日付プレースホルダー 4">
             <a:extLst>
               <a:ext uri="{FF2B5EF4-FFF2-40B4-BE49-F238E27FC236}">
-                <a16:creationId xmlns:a16="http://schemas.microsoft.com/office/drawing/2014/main" id="{8D9372AD-B647-8B86-80F0-CC98F3AA5BF0}"/>
+                <a16:creationId xmlns:a16="http://schemas.microsoft.com/office/drawing/2014/main" id="{D1A3C21D-7418-1705-33E0-0359D4DBDD89}"/>
               </a:ext>
             </a:extLst>
           </p:cNvPr>
@@ -2634,7 +2634,7 @@
           <a:bodyPr/>
           <a:lstStyle/>
           <a:p>
-            <a:fld id="{4347556D-961C-42B8-9381-BED9000E7EAE}" type="datetimeFigureOut">
+            <a:fld id="{5112284A-C95D-47F3-91B2-D34146ECB8CF}" type="datetimeFigureOut">
               <a:rPr kumimoji="1" lang="ja-JP" altLang="en-US" smtClean="0"/>
               <a:t>2026/7/30</a:t>
             </a:fld>
@@ -2647,7 +2647,7 @@
           <p:cNvPr id="6" name="フッター プレースホルダー 5">
             <a:extLst>
               <a:ext uri="{FF2B5EF4-FFF2-40B4-BE49-F238E27FC236}">
-                <a16:creationId xmlns:a16="http://schemas.microsoft.com/office/drawing/2014/main" id="{520B3B04-874E-3EDE-1CFF-4798F505044E}"/>
+                <a16:creationId xmlns:a16="http://schemas.microsoft.com/office/drawing/2014/main" id="{6F76D944-34E9-3141-33D4-90CD507F50C0}"/>
               </a:ext>
             </a:extLst>
           </p:cNvPr>
@@ -2672,7 +2672,7 @@
           <p:cNvPr id="7" name="スライド番号プレースホルダー 6">
             <a:extLst>
               <a:ext uri="{FF2B5EF4-FFF2-40B4-BE49-F238E27FC236}">
-                <a16:creationId xmlns:a16="http://schemas.microsoft.com/office/drawing/2014/main" id="{AF87A436-994B-2A4A-0522-CBA86A7E661C}"/>
+                <a16:creationId xmlns:a16="http://schemas.microsoft.com/office/drawing/2014/main" id="{FC1669B1-504F-AF4B-63F5-A7302E6C8940}"/>
               </a:ext>
             </a:extLst>
           </p:cNvPr>
@@ -2688,7 +2688,7 @@
           <a:bodyPr/>
           <a:lstStyle/>
           <a:p>
-            <a:fld id="{A880647F-F25E-4D2A-87A2-702BADF422CB}" type="slidenum">
+            <a:fld id="{C23EBC2A-0C05-4802-9AAF-93E32E64FFA0}" type="slidenum">
               <a:rPr kumimoji="1" lang="ja-JP" altLang="en-US" smtClean="0"/>
               <a:t>‹#›</a:t>
             </a:fld>
@@ -2699,7 +2699,7 @@
     </p:spTree>
     <p:extLst>
       <p:ext uri="{BB962C8B-B14F-4D97-AF65-F5344CB8AC3E}">
-        <p14:creationId xmlns:p14="http://schemas.microsoft.com/office/powerpoint/2010/main" val="2986532466"/>
+        <p14:creationId xmlns:p14="http://schemas.microsoft.com/office/powerpoint/2010/main" val="2325869309"/>
       </p:ext>
     </p:extLst>
   </p:cSld>
@@ -2731,7 +2731,7 @@
           <p:cNvPr id="2" name="タイトル 1">
             <a:extLst>
               <a:ext uri="{FF2B5EF4-FFF2-40B4-BE49-F238E27FC236}">
-                <a16:creationId xmlns:a16="http://schemas.microsoft.com/office/drawing/2014/main" id="{DFA55263-E616-DB0E-0DC8-4EF7362FE9E7}"/>
+                <a16:creationId xmlns:a16="http://schemas.microsoft.com/office/drawing/2014/main" id="{11C73846-4E2A-7B31-C9B5-C16D8A4512E6}"/>
               </a:ext>
             </a:extLst>
           </p:cNvPr>
@@ -2768,7 +2768,7 @@
           <p:cNvPr id="3" name="図プレースホルダー 2">
             <a:extLst>
               <a:ext uri="{FF2B5EF4-FFF2-40B4-BE49-F238E27FC236}">
-                <a16:creationId xmlns:a16="http://schemas.microsoft.com/office/drawing/2014/main" id="{0170C3CD-CC4C-4FB1-9661-A325777D23F0}"/>
+                <a16:creationId xmlns:a16="http://schemas.microsoft.com/office/drawing/2014/main" id="{251E56F7-9466-A3D4-33C4-445B56F939C2}"/>
               </a:ext>
             </a:extLst>
           </p:cNvPr>
@@ -2835,7 +2835,7 @@
           <p:cNvPr id="4" name="テキスト プレースホルダー 3">
             <a:extLst>
               <a:ext uri="{FF2B5EF4-FFF2-40B4-BE49-F238E27FC236}">
-                <a16:creationId xmlns:a16="http://schemas.microsoft.com/office/drawing/2014/main" id="{28D41872-3E1F-4A7F-AE2B-828EDA2D6345}"/>
+                <a16:creationId xmlns:a16="http://schemas.microsoft.com/office/drawing/2014/main" id="{F9A926EB-82D4-5521-C7F4-FE50FD033C5A}"/>
               </a:ext>
             </a:extLst>
           </p:cNvPr>
@@ -2906,7 +2906,7 @@
           <p:cNvPr id="5" name="日付プレースホルダー 4">
             <a:extLst>
               <a:ext uri="{FF2B5EF4-FFF2-40B4-BE49-F238E27FC236}">
-                <a16:creationId xmlns:a16="http://schemas.microsoft.com/office/drawing/2014/main" id="{78818A24-C2C3-1648-1C2A-B44C98BA6BBF}"/>
+                <a16:creationId xmlns:a16="http://schemas.microsoft.com/office/drawing/2014/main" id="{0CCC6F50-4A2D-EAFC-5844-71A349917525}"/>
               </a:ext>
             </a:extLst>
           </p:cNvPr>
@@ -2922,7 +2922,7 @@
           <a:bodyPr/>
           <a:lstStyle/>
           <a:p>
-            <a:fld id="{4347556D-961C-42B8-9381-BED9000E7EAE}" type="datetimeFigureOut">
+            <a:fld id="{5112284A-C95D-47F3-91B2-D34146ECB8CF}" type="datetimeFigureOut">
               <a:rPr kumimoji="1" lang="ja-JP" altLang="en-US" smtClean="0"/>
               <a:t>2026/7/30</a:t>
             </a:fld>
@@ -2935,7 +2935,7 @@
           <p:cNvPr id="6" name="フッター プレースホルダー 5">
             <a:extLst>
               <a:ext uri="{FF2B5EF4-FFF2-40B4-BE49-F238E27FC236}">
-                <a16:creationId xmlns:a16="http://schemas.microsoft.com/office/drawing/2014/main" id="{E691BB08-F56A-FA2C-7C1A-C40A0AE8D35B}"/>
+                <a16:creationId xmlns:a16="http://schemas.microsoft.com/office/drawing/2014/main" id="{A87A638D-B63A-BE9D-418D-509AE368937D}"/>
               </a:ext>
             </a:extLst>
           </p:cNvPr>
@@ -2960,7 +2960,7 @@
           <p:cNvPr id="7" name="スライド番号プレースホルダー 6">
             <a:extLst>
               <a:ext uri="{FF2B5EF4-FFF2-40B4-BE49-F238E27FC236}">
-                <a16:creationId xmlns:a16="http://schemas.microsoft.com/office/drawing/2014/main" id="{8BE3FD73-542C-C5B1-0E30-A2388900A01F}"/>
+                <a16:creationId xmlns:a16="http://schemas.microsoft.com/office/drawing/2014/main" id="{3FFA6B63-544B-F4DB-3116-15734111D900}"/>
               </a:ext>
             </a:extLst>
           </p:cNvPr>
@@ -2976,7 +2976,7 @@
           <a:bodyPr/>
           <a:lstStyle/>
           <a:p>
-            <a:fld id="{A880647F-F25E-4D2A-87A2-702BADF422CB}" type="slidenum">
+            <a:fld id="{C23EBC2A-0C05-4802-9AAF-93E32E64FFA0}" type="slidenum">
               <a:rPr kumimoji="1" lang="ja-JP" altLang="en-US" smtClean="0"/>
               <a:t>‹#›</a:t>
             </a:fld>
@@ -2987,7 +2987,7 @@
     </p:spTree>
     <p:extLst>
       <p:ext uri="{BB962C8B-B14F-4D97-AF65-F5344CB8AC3E}">
-        <p14:creationId xmlns:p14="http://schemas.microsoft.com/office/powerpoint/2010/main" val="2329516009"/>
+        <p14:creationId xmlns:p14="http://schemas.microsoft.com/office/powerpoint/2010/main" val="3464853696"/>
       </p:ext>
     </p:extLst>
   </p:cSld>
@@ -3024,7 +3024,7 @@
           <p:cNvPr id="2" name="タイトル プレースホルダー 1">
             <a:extLst>
               <a:ext uri="{FF2B5EF4-FFF2-40B4-BE49-F238E27FC236}">
-                <a16:creationId xmlns:a16="http://schemas.microsoft.com/office/drawing/2014/main" id="{4BB305C2-466F-BFBF-C661-D0B125DA825F}"/>
+                <a16:creationId xmlns:a16="http://schemas.microsoft.com/office/drawing/2014/main" id="{0E302A4F-88C3-B442-F090-7D88F54AD5AA}"/>
               </a:ext>
             </a:extLst>
           </p:cNvPr>
@@ -3062,7 +3062,7 @@
           <p:cNvPr id="3" name="テキスト プレースホルダー 2">
             <a:extLst>
               <a:ext uri="{FF2B5EF4-FFF2-40B4-BE49-F238E27FC236}">
-                <a16:creationId xmlns:a16="http://schemas.microsoft.com/office/drawing/2014/main" id="{DEAE5C55-7227-67F1-8916-F904C5F9881F}"/>
+                <a16:creationId xmlns:a16="http://schemas.microsoft.com/office/drawing/2014/main" id="{AA540F3B-BE1B-0407-4B9E-92B9A86E05D1}"/>
               </a:ext>
             </a:extLst>
           </p:cNvPr>
@@ -3161,7 +3161,7 @@
           <p:cNvPr id="4" name="日付プレースホルダー 3">
             <a:extLst>
               <a:ext uri="{FF2B5EF4-FFF2-40B4-BE49-F238E27FC236}">
-                <a16:creationId xmlns:a16="http://schemas.microsoft.com/office/drawing/2014/main" id="{4F9D6008-93B7-85A8-ABE5-B2C91114A7E8}"/>
+                <a16:creationId xmlns:a16="http://schemas.microsoft.com/office/drawing/2014/main" id="{0E753D9C-F64C-5AB3-D250-8E81652DACE6}"/>
               </a:ext>
             </a:extLst>
           </p:cNvPr>
@@ -3195,7 +3195,7 @@
             </a:lvl1pPr>
           </a:lstStyle>
           <a:p>
-            <a:fld id="{4347556D-961C-42B8-9381-BED9000E7EAE}" type="datetimeFigureOut">
+            <a:fld id="{5112284A-C95D-47F3-91B2-D34146ECB8CF}" type="datetimeFigureOut">
               <a:rPr kumimoji="1" lang="ja-JP" altLang="en-US" smtClean="0"/>
               <a:t>2026/7/30</a:t>
             </a:fld>
@@ -3208,7 +3208,7 @@
           <p:cNvPr id="5" name="フッター プレースホルダー 4">
             <a:extLst>
               <a:ext uri="{FF2B5EF4-FFF2-40B4-BE49-F238E27FC236}">
-                <a16:creationId xmlns:a16="http://schemas.microsoft.com/office/drawing/2014/main" id="{4BDF1A51-A637-92A9-152D-3A5D9B8859D6}"/>
+                <a16:creationId xmlns:a16="http://schemas.microsoft.com/office/drawing/2014/main" id="{CA908237-6FB5-067B-2A9E-9716996C6BF0}"/>
               </a:ext>
             </a:extLst>
           </p:cNvPr>
@@ -3251,7 +3251,7 @@
           <p:cNvPr id="6" name="スライド番号プレースホルダー 5">
             <a:extLst>
               <a:ext uri="{FF2B5EF4-FFF2-40B4-BE49-F238E27FC236}">
-                <a16:creationId xmlns:a16="http://schemas.microsoft.com/office/drawing/2014/main" id="{E667E928-9A10-E4DA-4698-E6FAF90E0AE4}"/>
+                <a16:creationId xmlns:a16="http://schemas.microsoft.com/office/drawing/2014/main" id="{F6605C70-1AAC-08F7-E637-DB72157971A3}"/>
               </a:ext>
             </a:extLst>
           </p:cNvPr>
@@ -3285,7 +3285,7 @@
             </a:lvl1pPr>
           </a:lstStyle>
           <a:p>
-            <a:fld id="{A880647F-F25E-4D2A-87A2-702BADF422CB}" type="slidenum">
+            <a:fld id="{C23EBC2A-0C05-4802-9AAF-93E32E64FFA0}" type="slidenum">
               <a:rPr kumimoji="1" lang="ja-JP" altLang="en-US" smtClean="0"/>
               <a:t>‹#›</a:t>
             </a:fld>
@@ -3296,7 +3296,7 @@
     </p:spTree>
     <p:extLst>
       <p:ext uri="{BB962C8B-B14F-4D97-AF65-F5344CB8AC3E}">
-        <p14:creationId xmlns:p14="http://schemas.microsoft.com/office/powerpoint/2010/main" val="2367465695"/>
+        <p14:creationId xmlns:p14="http://schemas.microsoft.com/office/powerpoint/2010/main" val="8612049"/>
       </p:ext>
     </p:extLst>
   </p:cSld>
@@ -3619,7 +3619,7 @@
           <p:cNvPr id="2" name="テキスト ボックス 1">
             <a:extLst>
               <a:ext uri="{FF2B5EF4-FFF2-40B4-BE49-F238E27FC236}">
-                <a16:creationId xmlns:a16="http://schemas.microsoft.com/office/drawing/2014/main" id="{E7E4F55E-259B-204F-0896-EC5B73395A75}"/>
+                <a16:creationId xmlns:a16="http://schemas.microsoft.com/office/drawing/2014/main" id="{08A62EAC-1390-24DE-ED19-8789F879FA29}"/>
               </a:ext>
             </a:extLst>
           </p:cNvPr>
@@ -3665,7 +3665,7 @@
           <p:cNvPr id="3" name="テキスト ボックス 2">
             <a:extLst>
               <a:ext uri="{FF2B5EF4-FFF2-40B4-BE49-F238E27FC236}">
-                <a16:creationId xmlns:a16="http://schemas.microsoft.com/office/drawing/2014/main" id="{0EB47831-7202-A472-5B9D-71BC9F6A6D73}"/>
+                <a16:creationId xmlns:a16="http://schemas.microsoft.com/office/drawing/2014/main" id="{E33DD947-C3EB-43ED-B9C2-E6596ECA892A}"/>
               </a:ext>
             </a:extLst>
           </p:cNvPr>
@@ -3695,14 +3695,17 @@
                 </a:solidFill>
                 <a:latin typeface="Arial" panose="020B0604020202020204" pitchFamily="34" charset="0"/>
               </a:rPr>
-              <a:t>reservation-waiting-time-v1 TECH EXPLANATION</a:t>
-            </a:r>
-            <a:endParaRPr kumimoji="1" lang="ja-JP" altLang="en-US" sz="3400" b="1">
-              <a:solidFill>
-                <a:srgbClr val="111111"/>
-              </a:solidFill>
-              <a:latin typeface="Arial" panose="020B0604020202020204" pitchFamily="34" charset="0"/>
-            </a:endParaRPr>
+              <a:t>Reservation Waiting Time V1</a:t>
+            </a:r>
+            <a:r>
+              <a:rPr kumimoji="1" lang="ja-JP" altLang="en-US" sz="3400" b="1">
+                <a:solidFill>
+                  <a:srgbClr val="111111"/>
+                </a:solidFill>
+                <a:latin typeface="Arial" panose="020B0604020202020204" pitchFamily="34" charset="0"/>
+              </a:rPr>
+              <a:t>の技術解説</a:t>
+            </a:r>
           </a:p>
         </p:txBody>
       </p:sp>
@@ -3711,7 +3714,7 @@
           <p:cNvPr id="4" name="テキスト ボックス 3">
             <a:extLst>
               <a:ext uri="{FF2B5EF4-FFF2-40B4-BE49-F238E27FC236}">
-                <a16:creationId xmlns:a16="http://schemas.microsoft.com/office/drawing/2014/main" id="{DC646027-1AE2-919B-7960-54D7E171F694}"/>
+                <a16:creationId xmlns:a16="http://schemas.microsoft.com/office/drawing/2014/main" id="{162F218C-8F8A-6A6C-55CA-6CB9D331F7C8}"/>
               </a:ext>
             </a:extLst>
           </p:cNvPr>
@@ -3735,20 +3738,14 @@
           <a:lstStyle/>
           <a:p>
             <a:r>
-              <a:rPr kumimoji="1" lang="en-US" altLang="ja-JP" sz="2000">
+              <a:rPr kumimoji="1" lang="ja-JP" altLang="en-US" sz="2000">
                 <a:solidFill>
                   <a:srgbClr val="333333"/>
                 </a:solidFill>
                 <a:latin typeface="Arial" panose="020B0604020202020204" pitchFamily="34" charset="0"/>
               </a:rPr>
-              <a:t>Architecture, implementation and commit history in 75 seconds</a:t>
-            </a:r>
-            <a:endParaRPr kumimoji="1" lang="ja-JP" altLang="en-US" sz="2000">
-              <a:solidFill>
-                <a:srgbClr val="333333"/>
-              </a:solidFill>
-              <a:latin typeface="Arial" panose="020B0604020202020204" pitchFamily="34" charset="0"/>
-            </a:endParaRPr>
+              <a:t>設計・実装・コミットから学ぶ短時間プレビュー</a:t>
+            </a:r>
           </a:p>
         </p:txBody>
       </p:sp>
@@ -3757,7 +3754,7 @@
           <p:cNvPr id="5" name="テキスト ボックス 4">
             <a:extLst>
               <a:ext uri="{FF2B5EF4-FFF2-40B4-BE49-F238E27FC236}">
-                <a16:creationId xmlns:a16="http://schemas.microsoft.com/office/drawing/2014/main" id="{8B4DB390-A91E-D68E-394F-9DEEA8CC4742}"/>
+                <a16:creationId xmlns:a16="http://schemas.microsoft.com/office/drawing/2014/main" id="{26D55C17-84BA-0446-0040-0242299D4F1F}"/>
               </a:ext>
             </a:extLst>
           </p:cNvPr>
@@ -3804,7 +3801,7 @@
             <a:hlinkClick r:id="" action="ppaction://media"/>
             <a:extLst>
               <a:ext uri="{FF2B5EF4-FFF2-40B4-BE49-F238E27FC236}">
-                <a16:creationId xmlns:a16="http://schemas.microsoft.com/office/drawing/2014/main" id="{C15EC979-19AD-DD6C-73A8-94918665BB22}"/>
+                <a16:creationId xmlns:a16="http://schemas.microsoft.com/office/drawing/2014/main" id="{CC3B4740-5657-C97D-AB57-132964F66608}"/>
               </a:ext>
             </a:extLst>
           </p:cNvPr>
@@ -3839,7 +3836,7 @@
     </p:spTree>
     <p:extLst>
       <p:ext uri="{BB962C8B-B14F-4D97-AF65-F5344CB8AC3E}">
-        <p14:creationId xmlns:p14="http://schemas.microsoft.com/office/powerpoint/2010/main" val="2203182763"/>
+        <p14:creationId xmlns:p14="http://schemas.microsoft.com/office/powerpoint/2010/main" val="1465288283"/>
       </p:ext>
     </p:extLst>
   </p:cSld>
@@ -3963,7 +3960,7 @@
           <p:cNvPr id="2" name="テキスト ボックス 1">
             <a:extLst>
               <a:ext uri="{FF2B5EF4-FFF2-40B4-BE49-F238E27FC236}">
-                <a16:creationId xmlns:a16="http://schemas.microsoft.com/office/drawing/2014/main" id="{84121278-C59A-0E42-A96B-6F3F6CA6ABA0}"/>
+                <a16:creationId xmlns:a16="http://schemas.microsoft.com/office/drawing/2014/main" id="{39BB05A9-47C1-5464-499C-FA4C6047919F}"/>
               </a:ext>
             </a:extLst>
           </p:cNvPr>
@@ -4009,7 +4006,7 @@
           <p:cNvPr id="3" name="テキスト ボックス 2">
             <a:extLst>
               <a:ext uri="{FF2B5EF4-FFF2-40B4-BE49-F238E27FC236}">
-                <a16:creationId xmlns:a16="http://schemas.microsoft.com/office/drawing/2014/main" id="{B752D745-03D5-EDFB-231B-1ED7897640B5}"/>
+                <a16:creationId xmlns:a16="http://schemas.microsoft.com/office/drawing/2014/main" id="{3E38CEFE-958B-311F-7D81-9111E36C3ECB}"/>
               </a:ext>
             </a:extLst>
           </p:cNvPr>
@@ -4033,20 +4030,14 @@
           <a:lstStyle/>
           <a:p>
             <a:r>
-              <a:rPr kumimoji="1" lang="en-US" altLang="ja-JP" sz="3400" b="1">
+              <a:rPr kumimoji="1" lang="ja-JP" altLang="en-US" sz="3400" b="1">
                 <a:solidFill>
                   <a:srgbClr val="111111"/>
                 </a:solidFill>
                 <a:latin typeface="Arial" panose="020B0604020202020204" pitchFamily="34" charset="0"/>
               </a:rPr>
-              <a:t>WHAT DOES IT SOLVE?</a:t>
-            </a:r>
-            <a:endParaRPr kumimoji="1" lang="ja-JP" altLang="en-US" sz="3400" b="1">
-              <a:solidFill>
-                <a:srgbClr val="111111"/>
-              </a:solidFill>
-              <a:latin typeface="Arial" panose="020B0604020202020204" pitchFamily="34" charset="0"/>
-            </a:endParaRPr>
+              <a:t>このプロジェクトは何を解決する？</a:t>
+            </a:r>
           </a:p>
         </p:txBody>
       </p:sp>
@@ -4055,7 +4046,7 @@
           <p:cNvPr id="4" name="テキスト ボックス 3">
             <a:extLst>
               <a:ext uri="{FF2B5EF4-FFF2-40B4-BE49-F238E27FC236}">
-                <a16:creationId xmlns:a16="http://schemas.microsoft.com/office/drawing/2014/main" id="{7A6A8BF7-ADAE-36F2-E527-D04976D6C8C8}"/>
+                <a16:creationId xmlns:a16="http://schemas.microsoft.com/office/drawing/2014/main" id="{C5F92751-93A5-4292-CD5D-49254D08C5FA}"/>
               </a:ext>
             </a:extLst>
           </p:cNvPr>
@@ -4104,7 +4095,7 @@
           <p:cNvPr id="5" name="テキスト ボックス 4">
             <a:extLst>
               <a:ext uri="{FF2B5EF4-FFF2-40B4-BE49-F238E27FC236}">
-                <a16:creationId xmlns:a16="http://schemas.microsoft.com/office/drawing/2014/main" id="{79675E85-32A6-2E7D-A971-06BAE9D3D1A9}"/>
+                <a16:creationId xmlns:a16="http://schemas.microsoft.com/office/drawing/2014/main" id="{E2A4B590-6DAD-EB65-B43F-590BA4EDBD71}"/>
               </a:ext>
             </a:extLst>
           </p:cNvPr>
@@ -4151,7 +4142,7 @@
             <a:hlinkClick r:id="" action="ppaction://media"/>
             <a:extLst>
               <a:ext uri="{FF2B5EF4-FFF2-40B4-BE49-F238E27FC236}">
-                <a16:creationId xmlns:a16="http://schemas.microsoft.com/office/drawing/2014/main" id="{D07BC42E-0C9C-9313-7C6E-D2259AA7F22B}"/>
+                <a16:creationId xmlns:a16="http://schemas.microsoft.com/office/drawing/2014/main" id="{3B3F8AE9-FCCE-CCA1-6F4F-9E55A4A97A93}"/>
               </a:ext>
             </a:extLst>
           </p:cNvPr>
@@ -4186,7 +4177,7 @@
     </p:spTree>
     <p:extLst>
       <p:ext uri="{BB962C8B-B14F-4D97-AF65-F5344CB8AC3E}">
-        <p14:creationId xmlns:p14="http://schemas.microsoft.com/office/powerpoint/2010/main" val="443187079"/>
+        <p14:creationId xmlns:p14="http://schemas.microsoft.com/office/powerpoint/2010/main" val="1466116781"/>
       </p:ext>
     </p:extLst>
   </p:cSld>
@@ -4310,7 +4301,7 @@
           <p:cNvPr id="2" name="テキスト ボックス 1">
             <a:extLst>
               <a:ext uri="{FF2B5EF4-FFF2-40B4-BE49-F238E27FC236}">
-                <a16:creationId xmlns:a16="http://schemas.microsoft.com/office/drawing/2014/main" id="{E3AC1C73-BD9C-96C8-4062-6794D481802F}"/>
+                <a16:creationId xmlns:a16="http://schemas.microsoft.com/office/drawing/2014/main" id="{C85FF129-3BD5-8912-90EF-3EE5E09F5666}"/>
               </a:ext>
             </a:extLst>
           </p:cNvPr>
@@ -4356,7 +4347,7 @@
           <p:cNvPr id="3" name="テキスト ボックス 2">
             <a:extLst>
               <a:ext uri="{FF2B5EF4-FFF2-40B4-BE49-F238E27FC236}">
-                <a16:creationId xmlns:a16="http://schemas.microsoft.com/office/drawing/2014/main" id="{1D839D84-5C19-094B-EA3B-607D5E65E116}"/>
+                <a16:creationId xmlns:a16="http://schemas.microsoft.com/office/drawing/2014/main" id="{A0786AF1-0F22-B3F3-A93F-95A284F432A2}"/>
               </a:ext>
             </a:extLst>
           </p:cNvPr>
@@ -4380,20 +4371,14 @@
           <a:lstStyle/>
           <a:p>
             <a:r>
-              <a:rPr kumimoji="1" lang="en-US" altLang="ja-JP" sz="3400" b="1">
+              <a:rPr kumimoji="1" lang="ja-JP" altLang="en-US" sz="3400" b="1">
                 <a:solidFill>
                   <a:srgbClr val="111111"/>
                 </a:solidFill>
                 <a:latin typeface="Arial" panose="020B0604020202020204" pitchFamily="34" charset="0"/>
               </a:rPr>
-              <a:t>TECH STACK</a:t>
-            </a:r>
-            <a:endParaRPr kumimoji="1" lang="ja-JP" altLang="en-US" sz="3400" b="1">
-              <a:solidFill>
-                <a:srgbClr val="111111"/>
-              </a:solidFill>
-              <a:latin typeface="Arial" panose="020B0604020202020204" pitchFamily="34" charset="0"/>
-            </a:endParaRPr>
+              <a:t>技術スタック</a:t>
+            </a:r>
           </a:p>
         </p:txBody>
       </p:sp>
@@ -4402,7 +4387,7 @@
           <p:cNvPr id="4" name="テキスト ボックス 3">
             <a:extLst>
               <a:ext uri="{FF2B5EF4-FFF2-40B4-BE49-F238E27FC236}">
-                <a16:creationId xmlns:a16="http://schemas.microsoft.com/office/drawing/2014/main" id="{D00ADC47-0C84-99E5-5089-24B750D3C77E}"/>
+                <a16:creationId xmlns:a16="http://schemas.microsoft.com/office/drawing/2014/main" id="{FFC26A2E-7AE6-F7F1-BD0E-EE5E7C432329}"/>
               </a:ext>
             </a:extLst>
           </p:cNvPr>
@@ -4412,7 +4397,7 @@
         <p:spPr>
           <a:xfrm>
             <a:off x="533400" y="3429000"/>
-            <a:ext cx="10795000" cy="400110"/>
+            <a:ext cx="10795000" cy="707886"/>
           </a:xfrm>
           <a:prstGeom prst="rect">
             <a:avLst/>
@@ -4426,13 +4411,22 @@
           <a:lstStyle/>
           <a:p>
             <a:r>
+              <a:rPr kumimoji="1" lang="ja-JP" altLang="en-US" sz="2000">
+                <a:solidFill>
+                  <a:srgbClr val="333333"/>
+                </a:solidFill>
+                <a:latin typeface="Arial" panose="020B0604020202020204" pitchFamily="34" charset="0"/>
+              </a:rPr>
+              <a:t>主要技術：</a:t>
+            </a:r>
+            <a:r>
               <a:rPr kumimoji="1" lang="en-US" altLang="ja-JP" sz="2000">
                 <a:solidFill>
                   <a:srgbClr val="333333"/>
                 </a:solidFill>
                 <a:latin typeface="Arial" panose="020B0604020202020204" pitchFamily="34" charset="0"/>
               </a:rPr>
-              <a:t>Primary technologies: TypeScript</a:t>
+              <a:t>TypeScript</a:t>
             </a:r>
             <a:r>
               <a:rPr kumimoji="1" lang="ja-JP" altLang="en-US" sz="2000">
@@ -4450,14 +4444,18 @@
                 </a:solidFill>
                 <a:latin typeface="Arial" panose="020B0604020202020204" pitchFamily="34" charset="0"/>
               </a:rPr>
-              <a:t>JavaScript</a:t>
-            </a:r>
-            <a:endParaRPr kumimoji="1" lang="ja-JP" altLang="en-US" sz="2000">
-              <a:solidFill>
-                <a:srgbClr val="333333"/>
-              </a:solidFill>
-              <a:latin typeface="Arial" panose="020B0604020202020204" pitchFamily="34" charset="0"/>
-            </a:endParaRPr>
+              <a:t>JavaScript
+</a:t>
+            </a:r>
+            <a:r>
+              <a:rPr kumimoji="1" lang="ja-JP" altLang="en-US" sz="2000">
+                <a:solidFill>
+                  <a:srgbClr val="333333"/>
+                </a:solidFill>
+                <a:latin typeface="Arial" panose="020B0604020202020204" pitchFamily="34" charset="0"/>
+              </a:rPr>
+              <a:t>役割を分け、保守しやすい構成を目指しています。</a:t>
+            </a:r>
           </a:p>
         </p:txBody>
       </p:sp>
@@ -4466,7 +4464,7 @@
           <p:cNvPr id="5" name="テキスト ボックス 4">
             <a:extLst>
               <a:ext uri="{FF2B5EF4-FFF2-40B4-BE49-F238E27FC236}">
-                <a16:creationId xmlns:a16="http://schemas.microsoft.com/office/drawing/2014/main" id="{13CAFF97-E1A7-9EF5-FE3F-9E5031C9E9B4}"/>
+                <a16:creationId xmlns:a16="http://schemas.microsoft.com/office/drawing/2014/main" id="{8F0D272D-265D-358E-F2EC-3A644F9BD4BF}"/>
               </a:ext>
             </a:extLst>
           </p:cNvPr>
@@ -4513,7 +4511,7 @@
             <a:hlinkClick r:id="" action="ppaction://media"/>
             <a:extLst>
               <a:ext uri="{FF2B5EF4-FFF2-40B4-BE49-F238E27FC236}">
-                <a16:creationId xmlns:a16="http://schemas.microsoft.com/office/drawing/2014/main" id="{1758B69D-641D-1308-6675-C30C21C54F15}"/>
+                <a16:creationId xmlns:a16="http://schemas.microsoft.com/office/drawing/2014/main" id="{F5079B7A-9FC1-16BA-F545-FF5B409F64B9}"/>
               </a:ext>
             </a:extLst>
           </p:cNvPr>
@@ -4548,7 +4546,7 @@
     </p:spTree>
     <p:extLst>
       <p:ext uri="{BB962C8B-B14F-4D97-AF65-F5344CB8AC3E}">
-        <p14:creationId xmlns:p14="http://schemas.microsoft.com/office/powerpoint/2010/main" val="2592274476"/>
+        <p14:creationId xmlns:p14="http://schemas.microsoft.com/office/powerpoint/2010/main" val="716904140"/>
       </p:ext>
     </p:extLst>
   </p:cSld>
@@ -4672,7 +4670,7 @@
           <p:cNvPr id="2" name="テキスト ボックス 1">
             <a:extLst>
               <a:ext uri="{FF2B5EF4-FFF2-40B4-BE49-F238E27FC236}">
-                <a16:creationId xmlns:a16="http://schemas.microsoft.com/office/drawing/2014/main" id="{C79BD174-EDFF-624C-BEC6-007C79AEF8CD}"/>
+                <a16:creationId xmlns:a16="http://schemas.microsoft.com/office/drawing/2014/main" id="{212521B7-8679-4F69-6DB2-363BF7A92E72}"/>
               </a:ext>
             </a:extLst>
           </p:cNvPr>
@@ -4718,7 +4716,7 @@
           <p:cNvPr id="3" name="テキスト ボックス 2">
             <a:extLst>
               <a:ext uri="{FF2B5EF4-FFF2-40B4-BE49-F238E27FC236}">
-                <a16:creationId xmlns:a16="http://schemas.microsoft.com/office/drawing/2014/main" id="{D1DC9879-7BF4-11AD-D9CC-F3A917CF42DF}"/>
+                <a16:creationId xmlns:a16="http://schemas.microsoft.com/office/drawing/2014/main" id="{606AFA80-15B6-7C6E-4F6A-F4D32DE91CB7}"/>
               </a:ext>
             </a:extLst>
           </p:cNvPr>
@@ -4742,20 +4740,14 @@
           <a:lstStyle/>
           <a:p>
             <a:r>
-              <a:rPr kumimoji="1" lang="en-US" altLang="ja-JP" sz="3400" b="1">
+              <a:rPr kumimoji="1" lang="ja-JP" altLang="en-US" sz="3400" b="1">
                 <a:solidFill>
                   <a:srgbClr val="111111"/>
                 </a:solidFill>
                 <a:latin typeface="Arial" panose="020B0604020202020204" pitchFamily="34" charset="0"/>
               </a:rPr>
-              <a:t>REPOSITORY HIGHLIGHTS</a:t>
-            </a:r>
-            <a:endParaRPr kumimoji="1" lang="ja-JP" altLang="en-US" sz="3400" b="1">
-              <a:solidFill>
-                <a:srgbClr val="111111"/>
-              </a:solidFill>
-              <a:latin typeface="Arial" panose="020B0604020202020204" pitchFamily="34" charset="0"/>
-            </a:endParaRPr>
+              <a:t>リポジトリの読みどころ</a:t>
+            </a:r>
           </a:p>
         </p:txBody>
       </p:sp>
@@ -4764,7 +4756,7 @@
           <p:cNvPr id="4" name="テキスト ボックス 3">
             <a:extLst>
               <a:ext uri="{FF2B5EF4-FFF2-40B4-BE49-F238E27FC236}">
-                <a16:creationId xmlns:a16="http://schemas.microsoft.com/office/drawing/2014/main" id="{28ECAEC9-7919-D936-3EBE-484021C7428B}"/>
+                <a16:creationId xmlns:a16="http://schemas.microsoft.com/office/drawing/2014/main" id="{247059C6-CEA2-D502-213B-BF9BFA18568B}"/>
               </a:ext>
             </a:extLst>
           </p:cNvPr>
@@ -4774,7 +4766,7 @@
         <p:spPr>
           <a:xfrm>
             <a:off x="533400" y="3429000"/>
-            <a:ext cx="10795000" cy="400110"/>
+            <a:ext cx="10795000" cy="707886"/>
           </a:xfrm>
           <a:prstGeom prst="rect">
             <a:avLst/>
@@ -4788,13 +4780,77 @@
           <a:lstStyle/>
           <a:p>
             <a:r>
+              <a:rPr kumimoji="1" lang="ja-JP" altLang="en-US" sz="2000">
+                <a:solidFill>
+                  <a:srgbClr val="333333"/>
+                </a:solidFill>
+                <a:latin typeface="Arial" panose="020B0604020202020204" pitchFamily="34" charset="0"/>
+              </a:rPr>
+              <a:t>公開コード、</a:t>
+            </a:r>
+            <a:r>
               <a:rPr kumimoji="1" lang="en-US" altLang="ja-JP" sz="2000">
                 <a:solidFill>
                   <a:srgbClr val="333333"/>
                 </a:solidFill>
                 <a:latin typeface="Arial" panose="020B0604020202020204" pitchFamily="34" charset="0"/>
               </a:rPr>
-              <a:t>Public source code, README and commit history reveal the design decisions.</a:t>
+              <a:t>README</a:t>
+            </a:r>
+            <a:r>
+              <a:rPr kumimoji="1" lang="ja-JP" altLang="en-US" sz="2000">
+                <a:solidFill>
+                  <a:srgbClr val="333333"/>
+                </a:solidFill>
+                <a:latin typeface="Arial" panose="020B0604020202020204" pitchFamily="34" charset="0"/>
+              </a:rPr>
+              <a:t>、コミット履歴から設計判断を確認できます。
+主なファイル：</a:t>
+            </a:r>
+            <a:r>
+              <a:rPr kumimoji="1" lang="en-US" altLang="ja-JP" sz="2000">
+                <a:solidFill>
+                  <a:srgbClr val="333333"/>
+                </a:solidFill>
+                <a:latin typeface="Arial" panose="020B0604020202020204" pitchFamily="34" charset="0"/>
+              </a:rPr>
+              <a:t>README.md</a:t>
+            </a:r>
+            <a:r>
+              <a:rPr kumimoji="1" lang="ja-JP" altLang="en-US" sz="2000">
+                <a:solidFill>
+                  <a:srgbClr val="333333"/>
+                </a:solidFill>
+                <a:latin typeface="Arial" panose="020B0604020202020204" pitchFamily="34" charset="0"/>
+              </a:rPr>
+              <a:t>、</a:t>
+            </a:r>
+            <a:r>
+              <a:rPr kumimoji="1" lang="en-US" altLang="ja-JP" sz="2000">
+                <a:solidFill>
+                  <a:srgbClr val="333333"/>
+                </a:solidFill>
+                <a:latin typeface="Arial" panose="020B0604020202020204" pitchFamily="34" charset="0"/>
+              </a:rPr>
+              <a:t>app</a:t>
+            </a:r>
+            <a:r>
+              <a:rPr kumimoji="1" lang="ja-JP" altLang="en-US" sz="2000">
+                <a:solidFill>
+                  <a:srgbClr val="333333"/>
+                </a:solidFill>
+                <a:latin typeface="Arial" panose="020B0604020202020204" pitchFamily="34" charset="0"/>
+              </a:rPr>
+              <a:t>、</a:t>
+            </a:r>
+            <a:r>
+              <a:rPr kumimoji="1" lang="en-US" altLang="ja-JP" sz="2000">
+                <a:solidFill>
+                  <a:srgbClr val="333333"/>
+                </a:solidFill>
+                <a:latin typeface="Arial" panose="020B0604020202020204" pitchFamily="34" charset="0"/>
+              </a:rPr>
+              <a:t>build</a:t>
             </a:r>
             <a:endParaRPr kumimoji="1" lang="ja-JP" altLang="en-US" sz="2000">
               <a:solidFill>
@@ -4810,7 +4866,7 @@
           <p:cNvPr id="5" name="テキスト ボックス 4">
             <a:extLst>
               <a:ext uri="{FF2B5EF4-FFF2-40B4-BE49-F238E27FC236}">
-                <a16:creationId xmlns:a16="http://schemas.microsoft.com/office/drawing/2014/main" id="{473C830E-18C3-67B3-4FF3-EFD83E5018C4}"/>
+                <a16:creationId xmlns:a16="http://schemas.microsoft.com/office/drawing/2014/main" id="{AC710283-3EBB-065B-0454-DA26E9E12809}"/>
               </a:ext>
             </a:extLst>
           </p:cNvPr>
@@ -4857,7 +4913,7 @@
             <a:hlinkClick r:id="" action="ppaction://media"/>
             <a:extLst>
               <a:ext uri="{FF2B5EF4-FFF2-40B4-BE49-F238E27FC236}">
-                <a16:creationId xmlns:a16="http://schemas.microsoft.com/office/drawing/2014/main" id="{C72DA83B-6D20-22C2-CBBF-FBD1E6C9381A}"/>
+                <a16:creationId xmlns:a16="http://schemas.microsoft.com/office/drawing/2014/main" id="{77ED0138-DB4D-57B6-13CE-A7DE8D1CF546}"/>
               </a:ext>
             </a:extLst>
           </p:cNvPr>
@@ -4892,7 +4948,7 @@
     </p:spTree>
     <p:extLst>
       <p:ext uri="{BB962C8B-B14F-4D97-AF65-F5344CB8AC3E}">
-        <p14:creationId xmlns:p14="http://schemas.microsoft.com/office/powerpoint/2010/main" val="3564883932"/>
+        <p14:creationId xmlns:p14="http://schemas.microsoft.com/office/powerpoint/2010/main" val="1859666222"/>
       </p:ext>
     </p:extLst>
   </p:cSld>
@@ -5016,7 +5072,7 @@
           <p:cNvPr id="2" name="テキスト ボックス 1">
             <a:extLst>
               <a:ext uri="{FF2B5EF4-FFF2-40B4-BE49-F238E27FC236}">
-                <a16:creationId xmlns:a16="http://schemas.microsoft.com/office/drawing/2014/main" id="{D825A223-461D-D25F-50DB-C82585A3BD7A}"/>
+                <a16:creationId xmlns:a16="http://schemas.microsoft.com/office/drawing/2014/main" id="{9290EFEA-7BEC-06A7-C62E-346230FB5233}"/>
               </a:ext>
             </a:extLst>
           </p:cNvPr>
@@ -5062,7 +5118,7 @@
           <p:cNvPr id="3" name="テキスト ボックス 2">
             <a:extLst>
               <a:ext uri="{FF2B5EF4-FFF2-40B4-BE49-F238E27FC236}">
-                <a16:creationId xmlns:a16="http://schemas.microsoft.com/office/drawing/2014/main" id="{A8F5C96F-740A-F0BB-E588-27844245221F}"/>
+                <a16:creationId xmlns:a16="http://schemas.microsoft.com/office/drawing/2014/main" id="{9F443624-8F0B-5D65-A82F-5E157F3299E6}"/>
               </a:ext>
             </a:extLst>
           </p:cNvPr>
@@ -5086,20 +5142,14 @@
           <a:lstStyle/>
           <a:p>
             <a:r>
-              <a:rPr kumimoji="1" lang="en-US" altLang="ja-JP" sz="3400" b="1">
+              <a:rPr kumimoji="1" lang="ja-JP" altLang="en-US" sz="3400" b="1">
                 <a:solidFill>
                   <a:srgbClr val="111111"/>
                 </a:solidFill>
                 <a:latin typeface="Arial" panose="020B0604020202020204" pitchFamily="34" charset="0"/>
               </a:rPr>
-              <a:t>ITERATIVE IMPROVEMENT</a:t>
-            </a:r>
-            <a:endParaRPr kumimoji="1" lang="ja-JP" altLang="en-US" sz="3400" b="1">
-              <a:solidFill>
-                <a:srgbClr val="111111"/>
-              </a:solidFill>
-              <a:latin typeface="Arial" panose="020B0604020202020204" pitchFamily="34" charset="0"/>
-            </a:endParaRPr>
+              <a:t>コミットから分かる改善</a:t>
+            </a:r>
           </a:p>
         </p:txBody>
       </p:sp>
@@ -5108,7 +5158,7 @@
           <p:cNvPr id="4" name="テキスト ボックス 3">
             <a:extLst>
               <a:ext uri="{FF2B5EF4-FFF2-40B4-BE49-F238E27FC236}">
-                <a16:creationId xmlns:a16="http://schemas.microsoft.com/office/drawing/2014/main" id="{FBDD60E0-43C5-DEA6-5E83-A7A4322CCEE2}"/>
+                <a16:creationId xmlns:a16="http://schemas.microsoft.com/office/drawing/2014/main" id="{1861507E-04E7-AF82-5551-84B7659DA456}"/>
               </a:ext>
             </a:extLst>
           </p:cNvPr>
@@ -5138,7 +5188,7 @@
                 </a:solidFill>
                 <a:latin typeface="Arial" panose="020B0604020202020204" pitchFamily="34" charset="0"/>
               </a:rPr>
-              <a:t>Small commits continuously improve features, quality and release readiness.</a:t>
+              <a:t>Configure hosted NearQueue release</a:t>
             </a:r>
             <a:endParaRPr kumimoji="1" lang="ja-JP" altLang="en-US" sz="2000">
               <a:solidFill>
@@ -5154,7 +5204,7 @@
           <p:cNvPr id="5" name="テキスト ボックス 4">
             <a:extLst>
               <a:ext uri="{FF2B5EF4-FFF2-40B4-BE49-F238E27FC236}">
-                <a16:creationId xmlns:a16="http://schemas.microsoft.com/office/drawing/2014/main" id="{DEFC9293-347E-30DB-E457-AD03CAAEF2D4}"/>
+                <a16:creationId xmlns:a16="http://schemas.microsoft.com/office/drawing/2014/main" id="{7342208C-09F7-1FF6-6BB9-CB44A16E3481}"/>
               </a:ext>
             </a:extLst>
           </p:cNvPr>
@@ -5201,7 +5251,7 @@
             <a:hlinkClick r:id="" action="ppaction://media"/>
             <a:extLst>
               <a:ext uri="{FF2B5EF4-FFF2-40B4-BE49-F238E27FC236}">
-                <a16:creationId xmlns:a16="http://schemas.microsoft.com/office/drawing/2014/main" id="{D4EA8811-3987-4300-10A7-A30E73DB1146}"/>
+                <a16:creationId xmlns:a16="http://schemas.microsoft.com/office/drawing/2014/main" id="{8DAD2C30-F76D-E3BF-768D-BA33DE2E4514}"/>
               </a:ext>
             </a:extLst>
           </p:cNvPr>
@@ -5236,7 +5286,7 @@
     </p:spTree>
     <p:extLst>
       <p:ext uri="{BB962C8B-B14F-4D97-AF65-F5344CB8AC3E}">
-        <p14:creationId xmlns:p14="http://schemas.microsoft.com/office/powerpoint/2010/main" val="744543690"/>
+        <p14:creationId xmlns:p14="http://schemas.microsoft.com/office/powerpoint/2010/main" val="2895922525"/>
       </p:ext>
     </p:extLst>
   </p:cSld>
@@ -5360,7 +5410,7 @@
           <p:cNvPr id="2" name="テキスト ボックス 1">
             <a:extLst>
               <a:ext uri="{FF2B5EF4-FFF2-40B4-BE49-F238E27FC236}">
-                <a16:creationId xmlns:a16="http://schemas.microsoft.com/office/drawing/2014/main" id="{DFA171C0-0A4D-CC40-5CAC-2604D6AD3D9C}"/>
+                <a16:creationId xmlns:a16="http://schemas.microsoft.com/office/drawing/2014/main" id="{080D3A46-4EF3-EE88-F6EA-877E699A054B}"/>
               </a:ext>
             </a:extLst>
           </p:cNvPr>
@@ -5406,7 +5456,7 @@
           <p:cNvPr id="3" name="テキスト ボックス 2">
             <a:extLst>
               <a:ext uri="{FF2B5EF4-FFF2-40B4-BE49-F238E27FC236}">
-                <a16:creationId xmlns:a16="http://schemas.microsoft.com/office/drawing/2014/main" id="{EE34D9D3-1F00-4C03-8C3A-9236E98AA057}"/>
+                <a16:creationId xmlns:a16="http://schemas.microsoft.com/office/drawing/2014/main" id="{A9B33CC4-5A79-9117-F633-E5C173BF72E6}"/>
               </a:ext>
             </a:extLst>
           </p:cNvPr>
@@ -5430,20 +5480,14 @@
           <a:lstStyle/>
           <a:p>
             <a:r>
-              <a:rPr kumimoji="1" lang="en-US" altLang="ja-JP" sz="3400" b="1">
+              <a:rPr kumimoji="1" lang="ja-JP" altLang="en-US" sz="3400" b="1">
                 <a:solidFill>
                   <a:srgbClr val="111111"/>
                 </a:solidFill>
                 <a:latin typeface="Arial" panose="020B0604020202020204" pitchFamily="34" charset="0"/>
               </a:rPr>
-              <a:t>READ THE FULL ARTICLE</a:t>
-            </a:r>
-            <a:endParaRPr kumimoji="1" lang="ja-JP" altLang="en-US" sz="3400" b="1">
-              <a:solidFill>
-                <a:srgbClr val="111111"/>
-              </a:solidFill>
-              <a:latin typeface="Arial" panose="020B0604020202020204" pitchFamily="34" charset="0"/>
-            </a:endParaRPr>
+              <a:t>詳しくは積み上げログへ</a:t>
+            </a:r>
           </a:p>
         </p:txBody>
       </p:sp>
@@ -5452,7 +5496,7 @@
           <p:cNvPr id="4" name="テキスト ボックス 3">
             <a:extLst>
               <a:ext uri="{FF2B5EF4-FFF2-40B4-BE49-F238E27FC236}">
-                <a16:creationId xmlns:a16="http://schemas.microsoft.com/office/drawing/2014/main" id="{CE2D5E30-C09E-AB5B-7E1A-2DB9B52EA2D8}"/>
+                <a16:creationId xmlns:a16="http://schemas.microsoft.com/office/drawing/2014/main" id="{449A1914-ABE6-8386-5F8C-5CEAAE6C596D}"/>
               </a:ext>
             </a:extLst>
           </p:cNvPr>
@@ -5476,14 +5520,32 @@
           <a:lstStyle/>
           <a:p>
             <a:r>
-              <a:rPr kumimoji="1" lang="sv-SE" altLang="ja-JP" sz="2000">
+              <a:rPr kumimoji="1" lang="zh-TW" altLang="en-US" sz="2000">
+                <a:solidFill>
+                  <a:srgbClr val="333333"/>
+                </a:solidFill>
+                <a:latin typeface="Arial" panose="020B0604020202020204" pitchFamily="34" charset="0"/>
+              </a:rPr>
+              <a:t>記事： </a:t>
+            </a:r>
+            <a:r>
+              <a:rPr kumimoji="1" lang="en-US" altLang="zh-TW" sz="2000">
                 <a:solidFill>
                   <a:srgbClr val="333333"/>
                 </a:solidFill>
                 <a:latin typeface="Arial" panose="020B0604020202020204" pitchFamily="34" charset="0"/>
               </a:rPr>
               <a:t>https://syunnjack.dev/articles/reservation-waiting-time-v1
-TSUMIAGE LOG</a:t>
+</a:t>
+            </a:r>
+            <a:r>
+              <a:rPr kumimoji="1" lang="zh-TW" altLang="en-US" sz="2000">
+                <a:solidFill>
+                  <a:srgbClr val="333333"/>
+                </a:solidFill>
+                <a:latin typeface="Arial" panose="020B0604020202020204" pitchFamily="34" charset="0"/>
+              </a:rPr>
+              <a:t>学び、作り、振り返る開発記録。</a:t>
             </a:r>
             <a:endParaRPr kumimoji="1" lang="ja-JP" altLang="en-US" sz="2000">
               <a:solidFill>
@@ -5499,7 +5561,7 @@
           <p:cNvPr id="5" name="テキスト ボックス 4">
             <a:extLst>
               <a:ext uri="{FF2B5EF4-FFF2-40B4-BE49-F238E27FC236}">
-                <a16:creationId xmlns:a16="http://schemas.microsoft.com/office/drawing/2014/main" id="{34F11D21-D1A8-760C-0FE6-F3956C79BD50}"/>
+                <a16:creationId xmlns:a16="http://schemas.microsoft.com/office/drawing/2014/main" id="{9DB75A4E-1AAA-0C97-85E0-B9101415B25A}"/>
               </a:ext>
             </a:extLst>
           </p:cNvPr>
@@ -5546,7 +5608,7 @@
             <a:hlinkClick r:id="" action="ppaction://media"/>
             <a:extLst>
               <a:ext uri="{FF2B5EF4-FFF2-40B4-BE49-F238E27FC236}">
-                <a16:creationId xmlns:a16="http://schemas.microsoft.com/office/drawing/2014/main" id="{A2396D53-C52D-788C-6B33-B55D0623AD0A}"/>
+                <a16:creationId xmlns:a16="http://schemas.microsoft.com/office/drawing/2014/main" id="{C36ACB9B-6293-109F-5041-7A1CC01A3B4B}"/>
               </a:ext>
             </a:extLst>
           </p:cNvPr>
@@ -5581,7 +5643,7 @@
     </p:spTree>
     <p:extLst>
       <p:ext uri="{BB962C8B-B14F-4D97-AF65-F5344CB8AC3E}">
-        <p14:creationId xmlns:p14="http://schemas.microsoft.com/office/powerpoint/2010/main" val="85878227"/>
+        <p14:creationId xmlns:p14="http://schemas.microsoft.com/office/powerpoint/2010/main" val="6653031"/>
       </p:ext>
     </p:extLst>
   </p:cSld>

--- a/public/videos/repositories/reservation-waiting-time-v1/reservation-waiting-time-v1-tech-preview.pptx
+++ b/public/videos/repositories/reservation-waiting-time-v1/reservation-waiting-time-v1-tech-preview.pptx
@@ -134,7 +134,7 @@
           <p:cNvPr id="2" name="タイトル 1">
             <a:extLst>
               <a:ext uri="{FF2B5EF4-FFF2-40B4-BE49-F238E27FC236}">
-                <a16:creationId xmlns:a16="http://schemas.microsoft.com/office/drawing/2014/main" id="{E54242E1-121B-DEDE-C0DF-C40446F5E1A5}"/>
+                <a16:creationId xmlns:a16="http://schemas.microsoft.com/office/drawing/2014/main" id="{7D351A7F-085D-C941-0858-8F05A1C4AD7A}"/>
               </a:ext>
             </a:extLst>
           </p:cNvPr>
@@ -171,7 +171,7 @@
           <p:cNvPr id="3" name="字幕 2">
             <a:extLst>
               <a:ext uri="{FF2B5EF4-FFF2-40B4-BE49-F238E27FC236}">
-                <a16:creationId xmlns:a16="http://schemas.microsoft.com/office/drawing/2014/main" id="{E5F5583F-EB2E-C1C4-901F-EBE3A78F12B1}"/>
+                <a16:creationId xmlns:a16="http://schemas.microsoft.com/office/drawing/2014/main" id="{ACA31F2B-8DDC-7B21-2B99-7DE94A6068D2}"/>
               </a:ext>
             </a:extLst>
           </p:cNvPr>
@@ -241,7 +241,7 @@
           <p:cNvPr id="4" name="日付プレースホルダー 3">
             <a:extLst>
               <a:ext uri="{FF2B5EF4-FFF2-40B4-BE49-F238E27FC236}">
-                <a16:creationId xmlns:a16="http://schemas.microsoft.com/office/drawing/2014/main" id="{8D038554-957B-38C4-23E1-83236A76118B}"/>
+                <a16:creationId xmlns:a16="http://schemas.microsoft.com/office/drawing/2014/main" id="{926D43A6-4134-53CF-230A-94A19D0A0A0E}"/>
               </a:ext>
             </a:extLst>
           </p:cNvPr>
@@ -257,7 +257,7 @@
           <a:bodyPr/>
           <a:lstStyle/>
           <a:p>
-            <a:fld id="{5112284A-C95D-47F3-91B2-D34146ECB8CF}" type="datetimeFigureOut">
+            <a:fld id="{C658F508-0733-460D-951D-CAE4D71DB2E5}" type="datetimeFigureOut">
               <a:rPr kumimoji="1" lang="ja-JP" altLang="en-US" smtClean="0"/>
               <a:t>2026/7/30</a:t>
             </a:fld>
@@ -270,7 +270,7 @@
           <p:cNvPr id="5" name="フッター プレースホルダー 4">
             <a:extLst>
               <a:ext uri="{FF2B5EF4-FFF2-40B4-BE49-F238E27FC236}">
-                <a16:creationId xmlns:a16="http://schemas.microsoft.com/office/drawing/2014/main" id="{76CC0869-FB46-17CC-2FF4-866E05A60ACD}"/>
+                <a16:creationId xmlns:a16="http://schemas.microsoft.com/office/drawing/2014/main" id="{A1016963-092C-94A8-A8A2-BA8B82DA331E}"/>
               </a:ext>
             </a:extLst>
           </p:cNvPr>
@@ -295,7 +295,7 @@
           <p:cNvPr id="6" name="スライド番号プレースホルダー 5">
             <a:extLst>
               <a:ext uri="{FF2B5EF4-FFF2-40B4-BE49-F238E27FC236}">
-                <a16:creationId xmlns:a16="http://schemas.microsoft.com/office/drawing/2014/main" id="{0016451F-8BA7-1B66-35F0-66611CB8E561}"/>
+                <a16:creationId xmlns:a16="http://schemas.microsoft.com/office/drawing/2014/main" id="{A5FDE00C-5590-E327-D077-FDA29C0CDDCA}"/>
               </a:ext>
             </a:extLst>
           </p:cNvPr>
@@ -311,7 +311,7 @@
           <a:bodyPr/>
           <a:lstStyle/>
           <a:p>
-            <a:fld id="{C23EBC2A-0C05-4802-9AAF-93E32E64FFA0}" type="slidenum">
+            <a:fld id="{17F59BEA-6BA2-4D82-AA5B-D813974AA8FE}" type="slidenum">
               <a:rPr kumimoji="1" lang="ja-JP" altLang="en-US" smtClean="0"/>
               <a:t>‹#›</a:t>
             </a:fld>
@@ -322,7 +322,7 @@
     </p:spTree>
     <p:extLst>
       <p:ext uri="{BB962C8B-B14F-4D97-AF65-F5344CB8AC3E}">
-        <p14:creationId xmlns:p14="http://schemas.microsoft.com/office/powerpoint/2010/main" val="1204570886"/>
+        <p14:creationId xmlns:p14="http://schemas.microsoft.com/office/powerpoint/2010/main" val="4055479997"/>
       </p:ext>
     </p:extLst>
   </p:cSld>
@@ -354,7 +354,7 @@
           <p:cNvPr id="2" name="タイトル 1">
             <a:extLst>
               <a:ext uri="{FF2B5EF4-FFF2-40B4-BE49-F238E27FC236}">
-                <a16:creationId xmlns:a16="http://schemas.microsoft.com/office/drawing/2014/main" id="{F0CE20D0-F63C-F469-7009-155EB76C7C58}"/>
+                <a16:creationId xmlns:a16="http://schemas.microsoft.com/office/drawing/2014/main" id="{441C56C0-93A2-549E-DA8F-16F9D9B36D32}"/>
               </a:ext>
             </a:extLst>
           </p:cNvPr>
@@ -382,7 +382,7 @@
           <p:cNvPr id="3" name="縦書きテキスト プレースホルダー 2">
             <a:extLst>
               <a:ext uri="{FF2B5EF4-FFF2-40B4-BE49-F238E27FC236}">
-                <a16:creationId xmlns:a16="http://schemas.microsoft.com/office/drawing/2014/main" id="{8729D805-AF42-C6E8-9483-A1C13E426281}"/>
+                <a16:creationId xmlns:a16="http://schemas.microsoft.com/office/drawing/2014/main" id="{0F39864A-EA27-704C-2A37-E86A12196460}"/>
               </a:ext>
             </a:extLst>
           </p:cNvPr>
@@ -471,7 +471,7 @@
           <p:cNvPr id="4" name="日付プレースホルダー 3">
             <a:extLst>
               <a:ext uri="{FF2B5EF4-FFF2-40B4-BE49-F238E27FC236}">
-                <a16:creationId xmlns:a16="http://schemas.microsoft.com/office/drawing/2014/main" id="{420F317C-8ECA-7738-D26A-7DE2A650F655}"/>
+                <a16:creationId xmlns:a16="http://schemas.microsoft.com/office/drawing/2014/main" id="{053F9983-A553-EFC4-BE12-8C4924651F28}"/>
               </a:ext>
             </a:extLst>
           </p:cNvPr>
@@ -487,7 +487,7 @@
           <a:bodyPr/>
           <a:lstStyle/>
           <a:p>
-            <a:fld id="{5112284A-C95D-47F3-91B2-D34146ECB8CF}" type="datetimeFigureOut">
+            <a:fld id="{C658F508-0733-460D-951D-CAE4D71DB2E5}" type="datetimeFigureOut">
               <a:rPr kumimoji="1" lang="ja-JP" altLang="en-US" smtClean="0"/>
               <a:t>2026/7/30</a:t>
             </a:fld>
@@ -500,7 +500,7 @@
           <p:cNvPr id="5" name="フッター プレースホルダー 4">
             <a:extLst>
               <a:ext uri="{FF2B5EF4-FFF2-40B4-BE49-F238E27FC236}">
-                <a16:creationId xmlns:a16="http://schemas.microsoft.com/office/drawing/2014/main" id="{B7E57C53-65A9-7BF9-C391-13C4B5E5E8EF}"/>
+                <a16:creationId xmlns:a16="http://schemas.microsoft.com/office/drawing/2014/main" id="{9D4B95DD-002C-914C-9B30-EDC3185E0913}"/>
               </a:ext>
             </a:extLst>
           </p:cNvPr>
@@ -525,7 +525,7 @@
           <p:cNvPr id="6" name="スライド番号プレースホルダー 5">
             <a:extLst>
               <a:ext uri="{FF2B5EF4-FFF2-40B4-BE49-F238E27FC236}">
-                <a16:creationId xmlns:a16="http://schemas.microsoft.com/office/drawing/2014/main" id="{97C28F89-FB14-6C9B-C06D-AAAA53E1873A}"/>
+                <a16:creationId xmlns:a16="http://schemas.microsoft.com/office/drawing/2014/main" id="{30E4AC4C-F596-0CC0-0CCB-05220F7FBB3A}"/>
               </a:ext>
             </a:extLst>
           </p:cNvPr>
@@ -541,7 +541,7 @@
           <a:bodyPr/>
           <a:lstStyle/>
           <a:p>
-            <a:fld id="{C23EBC2A-0C05-4802-9AAF-93E32E64FFA0}" type="slidenum">
+            <a:fld id="{17F59BEA-6BA2-4D82-AA5B-D813974AA8FE}" type="slidenum">
               <a:rPr kumimoji="1" lang="ja-JP" altLang="en-US" smtClean="0"/>
               <a:t>‹#›</a:t>
             </a:fld>
@@ -552,7 +552,7 @@
     </p:spTree>
     <p:extLst>
       <p:ext uri="{BB962C8B-B14F-4D97-AF65-F5344CB8AC3E}">
-        <p14:creationId xmlns:p14="http://schemas.microsoft.com/office/powerpoint/2010/main" val="3718852183"/>
+        <p14:creationId xmlns:p14="http://schemas.microsoft.com/office/powerpoint/2010/main" val="1400021323"/>
       </p:ext>
     </p:extLst>
   </p:cSld>
@@ -584,7 +584,7 @@
           <p:cNvPr id="2" name="縦書きタイトル 1">
             <a:extLst>
               <a:ext uri="{FF2B5EF4-FFF2-40B4-BE49-F238E27FC236}">
-                <a16:creationId xmlns:a16="http://schemas.microsoft.com/office/drawing/2014/main" id="{6DDA2526-8F2D-D9B0-2584-9E0211150697}"/>
+                <a16:creationId xmlns:a16="http://schemas.microsoft.com/office/drawing/2014/main" id="{03B3DD9A-3629-8A1E-4769-738F9DD2B027}"/>
               </a:ext>
             </a:extLst>
           </p:cNvPr>
@@ -617,7 +617,7 @@
           <p:cNvPr id="3" name="縦書きテキスト プレースホルダー 2">
             <a:extLst>
               <a:ext uri="{FF2B5EF4-FFF2-40B4-BE49-F238E27FC236}">
-                <a16:creationId xmlns:a16="http://schemas.microsoft.com/office/drawing/2014/main" id="{9ECACC4E-4008-9DA5-EC14-EE083395620F}"/>
+                <a16:creationId xmlns:a16="http://schemas.microsoft.com/office/drawing/2014/main" id="{1017AB4E-493D-609A-CEA3-6CCCD714322E}"/>
               </a:ext>
             </a:extLst>
           </p:cNvPr>
@@ -711,7 +711,7 @@
           <p:cNvPr id="4" name="日付プレースホルダー 3">
             <a:extLst>
               <a:ext uri="{FF2B5EF4-FFF2-40B4-BE49-F238E27FC236}">
-                <a16:creationId xmlns:a16="http://schemas.microsoft.com/office/drawing/2014/main" id="{CED73BD5-C480-6E50-DFBD-5E8B264A7319}"/>
+                <a16:creationId xmlns:a16="http://schemas.microsoft.com/office/drawing/2014/main" id="{26E9B559-D539-F82E-3DD6-934546C6862A}"/>
               </a:ext>
             </a:extLst>
           </p:cNvPr>
@@ -727,7 +727,7 @@
           <a:bodyPr/>
           <a:lstStyle/>
           <a:p>
-            <a:fld id="{5112284A-C95D-47F3-91B2-D34146ECB8CF}" type="datetimeFigureOut">
+            <a:fld id="{C658F508-0733-460D-951D-CAE4D71DB2E5}" type="datetimeFigureOut">
               <a:rPr kumimoji="1" lang="ja-JP" altLang="en-US" smtClean="0"/>
               <a:t>2026/7/30</a:t>
             </a:fld>
@@ -740,7 +740,7 @@
           <p:cNvPr id="5" name="フッター プレースホルダー 4">
             <a:extLst>
               <a:ext uri="{FF2B5EF4-FFF2-40B4-BE49-F238E27FC236}">
-                <a16:creationId xmlns:a16="http://schemas.microsoft.com/office/drawing/2014/main" id="{14ADC4F5-B2B5-760A-95D1-6E8EA0E1315A}"/>
+                <a16:creationId xmlns:a16="http://schemas.microsoft.com/office/drawing/2014/main" id="{DEBC67A8-B06C-523C-4278-9301B2D1D83F}"/>
               </a:ext>
             </a:extLst>
           </p:cNvPr>
@@ -765,7 +765,7 @@
           <p:cNvPr id="6" name="スライド番号プレースホルダー 5">
             <a:extLst>
               <a:ext uri="{FF2B5EF4-FFF2-40B4-BE49-F238E27FC236}">
-                <a16:creationId xmlns:a16="http://schemas.microsoft.com/office/drawing/2014/main" id="{021D5BF0-72D1-D5D5-F829-373873BC631B}"/>
+                <a16:creationId xmlns:a16="http://schemas.microsoft.com/office/drawing/2014/main" id="{527C61FA-0641-274E-E8AE-4E433D97BEE9}"/>
               </a:ext>
             </a:extLst>
           </p:cNvPr>
@@ -781,7 +781,7 @@
           <a:bodyPr/>
           <a:lstStyle/>
           <a:p>
-            <a:fld id="{C23EBC2A-0C05-4802-9AAF-93E32E64FFA0}" type="slidenum">
+            <a:fld id="{17F59BEA-6BA2-4D82-AA5B-D813974AA8FE}" type="slidenum">
               <a:rPr kumimoji="1" lang="ja-JP" altLang="en-US" smtClean="0"/>
               <a:t>‹#›</a:t>
             </a:fld>
@@ -792,7 +792,7 @@
     </p:spTree>
     <p:extLst>
       <p:ext uri="{BB962C8B-B14F-4D97-AF65-F5344CB8AC3E}">
-        <p14:creationId xmlns:p14="http://schemas.microsoft.com/office/powerpoint/2010/main" val="406871062"/>
+        <p14:creationId xmlns:p14="http://schemas.microsoft.com/office/powerpoint/2010/main" val="3427471908"/>
       </p:ext>
     </p:extLst>
   </p:cSld>
@@ -824,7 +824,7 @@
           <p:cNvPr id="2" name="タイトル 1">
             <a:extLst>
               <a:ext uri="{FF2B5EF4-FFF2-40B4-BE49-F238E27FC236}">
-                <a16:creationId xmlns:a16="http://schemas.microsoft.com/office/drawing/2014/main" id="{DF7B5809-7F81-D7BE-491D-69EA9289C4B0}"/>
+                <a16:creationId xmlns:a16="http://schemas.microsoft.com/office/drawing/2014/main" id="{91857033-2EBE-E87E-EE3F-ED6CCE1D44F1}"/>
               </a:ext>
             </a:extLst>
           </p:cNvPr>
@@ -852,7 +852,7 @@
           <p:cNvPr id="3" name="コンテンツ プレースホルダー 2">
             <a:extLst>
               <a:ext uri="{FF2B5EF4-FFF2-40B4-BE49-F238E27FC236}">
-                <a16:creationId xmlns:a16="http://schemas.microsoft.com/office/drawing/2014/main" id="{42CC1F9D-6835-114E-AD60-5D9F355C5A58}"/>
+                <a16:creationId xmlns:a16="http://schemas.microsoft.com/office/drawing/2014/main" id="{86461D5C-D4EE-5CD7-12A0-630E06E2C621}"/>
               </a:ext>
             </a:extLst>
           </p:cNvPr>
@@ -941,7 +941,7 @@
           <p:cNvPr id="4" name="日付プレースホルダー 3">
             <a:extLst>
               <a:ext uri="{FF2B5EF4-FFF2-40B4-BE49-F238E27FC236}">
-                <a16:creationId xmlns:a16="http://schemas.microsoft.com/office/drawing/2014/main" id="{14EE1C17-1ED0-4F8A-1BD2-B8E28F74A490}"/>
+                <a16:creationId xmlns:a16="http://schemas.microsoft.com/office/drawing/2014/main" id="{DDA8DF23-FDA2-1854-1965-CBB321BCABE8}"/>
               </a:ext>
             </a:extLst>
           </p:cNvPr>
@@ -957,7 +957,7 @@
           <a:bodyPr/>
           <a:lstStyle/>
           <a:p>
-            <a:fld id="{5112284A-C95D-47F3-91B2-D34146ECB8CF}" type="datetimeFigureOut">
+            <a:fld id="{C658F508-0733-460D-951D-CAE4D71DB2E5}" type="datetimeFigureOut">
               <a:rPr kumimoji="1" lang="ja-JP" altLang="en-US" smtClean="0"/>
               <a:t>2026/7/30</a:t>
             </a:fld>
@@ -970,7 +970,7 @@
           <p:cNvPr id="5" name="フッター プレースホルダー 4">
             <a:extLst>
               <a:ext uri="{FF2B5EF4-FFF2-40B4-BE49-F238E27FC236}">
-                <a16:creationId xmlns:a16="http://schemas.microsoft.com/office/drawing/2014/main" id="{413CA0DD-0344-9AAE-7B63-DF156F0FF3BD}"/>
+                <a16:creationId xmlns:a16="http://schemas.microsoft.com/office/drawing/2014/main" id="{D1B24AB7-A7F0-8DBF-95DC-A2C2115D0994}"/>
               </a:ext>
             </a:extLst>
           </p:cNvPr>
@@ -995,7 +995,7 @@
           <p:cNvPr id="6" name="スライド番号プレースホルダー 5">
             <a:extLst>
               <a:ext uri="{FF2B5EF4-FFF2-40B4-BE49-F238E27FC236}">
-                <a16:creationId xmlns:a16="http://schemas.microsoft.com/office/drawing/2014/main" id="{AD2B1D66-0046-126C-3233-39A01974922D}"/>
+                <a16:creationId xmlns:a16="http://schemas.microsoft.com/office/drawing/2014/main" id="{C589E1B8-BA1D-A7EE-9740-AAD4940DDD63}"/>
               </a:ext>
             </a:extLst>
           </p:cNvPr>
@@ -1011,7 +1011,7 @@
           <a:bodyPr/>
           <a:lstStyle/>
           <a:p>
-            <a:fld id="{C23EBC2A-0C05-4802-9AAF-93E32E64FFA0}" type="slidenum">
+            <a:fld id="{17F59BEA-6BA2-4D82-AA5B-D813974AA8FE}" type="slidenum">
               <a:rPr kumimoji="1" lang="ja-JP" altLang="en-US" smtClean="0"/>
               <a:t>‹#›</a:t>
             </a:fld>
@@ -1022,7 +1022,7 @@
     </p:spTree>
     <p:extLst>
       <p:ext uri="{BB962C8B-B14F-4D97-AF65-F5344CB8AC3E}">
-        <p14:creationId xmlns:p14="http://schemas.microsoft.com/office/powerpoint/2010/main" val="19075354"/>
+        <p14:creationId xmlns:p14="http://schemas.microsoft.com/office/powerpoint/2010/main" val="3040871922"/>
       </p:ext>
     </p:extLst>
   </p:cSld>
@@ -1054,7 +1054,7 @@
           <p:cNvPr id="2" name="タイトル 1">
             <a:extLst>
               <a:ext uri="{FF2B5EF4-FFF2-40B4-BE49-F238E27FC236}">
-                <a16:creationId xmlns:a16="http://schemas.microsoft.com/office/drawing/2014/main" id="{54211DCF-8553-79A3-A442-5B7C20D3D3D8}"/>
+                <a16:creationId xmlns:a16="http://schemas.microsoft.com/office/drawing/2014/main" id="{5B152856-55CE-0B3C-C730-029B5A4D1FAB}"/>
               </a:ext>
             </a:extLst>
           </p:cNvPr>
@@ -1091,7 +1091,7 @@
           <p:cNvPr id="3" name="テキスト プレースホルダー 2">
             <a:extLst>
               <a:ext uri="{FF2B5EF4-FFF2-40B4-BE49-F238E27FC236}">
-                <a16:creationId xmlns:a16="http://schemas.microsoft.com/office/drawing/2014/main" id="{CD758655-0E03-BFCC-2585-49EA0F4A963F}"/>
+                <a16:creationId xmlns:a16="http://schemas.microsoft.com/office/drawing/2014/main" id="{12B887C0-7BE9-403A-F977-1C90119593A6}"/>
               </a:ext>
             </a:extLst>
           </p:cNvPr>
@@ -1216,7 +1216,7 @@
           <p:cNvPr id="4" name="日付プレースホルダー 3">
             <a:extLst>
               <a:ext uri="{FF2B5EF4-FFF2-40B4-BE49-F238E27FC236}">
-                <a16:creationId xmlns:a16="http://schemas.microsoft.com/office/drawing/2014/main" id="{3EEC992C-8355-2368-0712-4B9A74320489}"/>
+                <a16:creationId xmlns:a16="http://schemas.microsoft.com/office/drawing/2014/main" id="{0AAD6AAB-44C1-EA0F-6DCD-E10A56F89ED5}"/>
               </a:ext>
             </a:extLst>
           </p:cNvPr>
@@ -1232,7 +1232,7 @@
           <a:bodyPr/>
           <a:lstStyle/>
           <a:p>
-            <a:fld id="{5112284A-C95D-47F3-91B2-D34146ECB8CF}" type="datetimeFigureOut">
+            <a:fld id="{C658F508-0733-460D-951D-CAE4D71DB2E5}" type="datetimeFigureOut">
               <a:rPr kumimoji="1" lang="ja-JP" altLang="en-US" smtClean="0"/>
               <a:t>2026/7/30</a:t>
             </a:fld>
@@ -1245,7 +1245,7 @@
           <p:cNvPr id="5" name="フッター プレースホルダー 4">
             <a:extLst>
               <a:ext uri="{FF2B5EF4-FFF2-40B4-BE49-F238E27FC236}">
-                <a16:creationId xmlns:a16="http://schemas.microsoft.com/office/drawing/2014/main" id="{F5DF447C-5187-0D31-0E05-CDEEEA36BA8E}"/>
+                <a16:creationId xmlns:a16="http://schemas.microsoft.com/office/drawing/2014/main" id="{1AC0CE45-D53F-F2FB-962D-FC262E3D7529}"/>
               </a:ext>
             </a:extLst>
           </p:cNvPr>
@@ -1270,7 +1270,7 @@
           <p:cNvPr id="6" name="スライド番号プレースホルダー 5">
             <a:extLst>
               <a:ext uri="{FF2B5EF4-FFF2-40B4-BE49-F238E27FC236}">
-                <a16:creationId xmlns:a16="http://schemas.microsoft.com/office/drawing/2014/main" id="{E640BA6F-4B02-9312-6CEE-7D30678F9810}"/>
+                <a16:creationId xmlns:a16="http://schemas.microsoft.com/office/drawing/2014/main" id="{7F9ABA46-0FD8-6FDC-B7AF-8831066D23B6}"/>
               </a:ext>
             </a:extLst>
           </p:cNvPr>
@@ -1286,7 +1286,7 @@
           <a:bodyPr/>
           <a:lstStyle/>
           <a:p>
-            <a:fld id="{C23EBC2A-0C05-4802-9AAF-93E32E64FFA0}" type="slidenum">
+            <a:fld id="{17F59BEA-6BA2-4D82-AA5B-D813974AA8FE}" type="slidenum">
               <a:rPr kumimoji="1" lang="ja-JP" altLang="en-US" smtClean="0"/>
               <a:t>‹#›</a:t>
             </a:fld>
@@ -1297,7 +1297,7 @@
     </p:spTree>
     <p:extLst>
       <p:ext uri="{BB962C8B-B14F-4D97-AF65-F5344CB8AC3E}">
-        <p14:creationId xmlns:p14="http://schemas.microsoft.com/office/powerpoint/2010/main" val="2377691075"/>
+        <p14:creationId xmlns:p14="http://schemas.microsoft.com/office/powerpoint/2010/main" val="2809915889"/>
       </p:ext>
     </p:extLst>
   </p:cSld>
@@ -1329,7 +1329,7 @@
           <p:cNvPr id="2" name="タイトル 1">
             <a:extLst>
               <a:ext uri="{FF2B5EF4-FFF2-40B4-BE49-F238E27FC236}">
-                <a16:creationId xmlns:a16="http://schemas.microsoft.com/office/drawing/2014/main" id="{896DA405-0F5C-CC58-FE33-DE9B1EA1A23C}"/>
+                <a16:creationId xmlns:a16="http://schemas.microsoft.com/office/drawing/2014/main" id="{C1C17FA7-DE25-63EC-83CE-C355D39A4711}"/>
               </a:ext>
             </a:extLst>
           </p:cNvPr>
@@ -1357,7 +1357,7 @@
           <p:cNvPr id="3" name="コンテンツ プレースホルダー 2">
             <a:extLst>
               <a:ext uri="{FF2B5EF4-FFF2-40B4-BE49-F238E27FC236}">
-                <a16:creationId xmlns:a16="http://schemas.microsoft.com/office/drawing/2014/main" id="{935A9F15-3BD5-3F7E-0FA9-2F4A361AFDFD}"/>
+                <a16:creationId xmlns:a16="http://schemas.microsoft.com/office/drawing/2014/main" id="{24941EF7-9DEC-21EE-163B-66A88C9D6CFF}"/>
               </a:ext>
             </a:extLst>
           </p:cNvPr>
@@ -1451,7 +1451,7 @@
           <p:cNvPr id="4" name="コンテンツ プレースホルダー 3">
             <a:extLst>
               <a:ext uri="{FF2B5EF4-FFF2-40B4-BE49-F238E27FC236}">
-                <a16:creationId xmlns:a16="http://schemas.microsoft.com/office/drawing/2014/main" id="{1119646B-8906-6215-0007-33006D40F697}"/>
+                <a16:creationId xmlns:a16="http://schemas.microsoft.com/office/drawing/2014/main" id="{168C62EC-936B-D0C5-5EBD-735611622295}"/>
               </a:ext>
             </a:extLst>
           </p:cNvPr>
@@ -1545,7 +1545,7 @@
           <p:cNvPr id="5" name="日付プレースホルダー 4">
             <a:extLst>
               <a:ext uri="{FF2B5EF4-FFF2-40B4-BE49-F238E27FC236}">
-                <a16:creationId xmlns:a16="http://schemas.microsoft.com/office/drawing/2014/main" id="{7287B06F-0C1D-C139-D2BC-1CAB672C290E}"/>
+                <a16:creationId xmlns:a16="http://schemas.microsoft.com/office/drawing/2014/main" id="{9B3F3B36-FC46-9CE7-F95C-EEC38E5B3E11}"/>
               </a:ext>
             </a:extLst>
           </p:cNvPr>
@@ -1561,7 +1561,7 @@
           <a:bodyPr/>
           <a:lstStyle/>
           <a:p>
-            <a:fld id="{5112284A-C95D-47F3-91B2-D34146ECB8CF}" type="datetimeFigureOut">
+            <a:fld id="{C658F508-0733-460D-951D-CAE4D71DB2E5}" type="datetimeFigureOut">
               <a:rPr kumimoji="1" lang="ja-JP" altLang="en-US" smtClean="0"/>
               <a:t>2026/7/30</a:t>
             </a:fld>
@@ -1574,7 +1574,7 @@
           <p:cNvPr id="6" name="フッター プレースホルダー 5">
             <a:extLst>
               <a:ext uri="{FF2B5EF4-FFF2-40B4-BE49-F238E27FC236}">
-                <a16:creationId xmlns:a16="http://schemas.microsoft.com/office/drawing/2014/main" id="{7F29F483-1903-EEEA-CEF2-00E38E3D4E8F}"/>
+                <a16:creationId xmlns:a16="http://schemas.microsoft.com/office/drawing/2014/main" id="{F8C9F5F1-0996-20FA-EC12-CD45F8E0B1E1}"/>
               </a:ext>
             </a:extLst>
           </p:cNvPr>
@@ -1599,7 +1599,7 @@
           <p:cNvPr id="7" name="スライド番号プレースホルダー 6">
             <a:extLst>
               <a:ext uri="{FF2B5EF4-FFF2-40B4-BE49-F238E27FC236}">
-                <a16:creationId xmlns:a16="http://schemas.microsoft.com/office/drawing/2014/main" id="{AAA9255E-1945-E9EA-6EEF-44F9CAED157D}"/>
+                <a16:creationId xmlns:a16="http://schemas.microsoft.com/office/drawing/2014/main" id="{976C124E-DC92-0D87-54FA-7C922A6658E0}"/>
               </a:ext>
             </a:extLst>
           </p:cNvPr>
@@ -1615,7 +1615,7 @@
           <a:bodyPr/>
           <a:lstStyle/>
           <a:p>
-            <a:fld id="{C23EBC2A-0C05-4802-9AAF-93E32E64FFA0}" type="slidenum">
+            <a:fld id="{17F59BEA-6BA2-4D82-AA5B-D813974AA8FE}" type="slidenum">
               <a:rPr kumimoji="1" lang="ja-JP" altLang="en-US" smtClean="0"/>
               <a:t>‹#›</a:t>
             </a:fld>
@@ -1626,7 +1626,7 @@
     </p:spTree>
     <p:extLst>
       <p:ext uri="{BB962C8B-B14F-4D97-AF65-F5344CB8AC3E}">
-        <p14:creationId xmlns:p14="http://schemas.microsoft.com/office/powerpoint/2010/main" val="1822655708"/>
+        <p14:creationId xmlns:p14="http://schemas.microsoft.com/office/powerpoint/2010/main" val="301985849"/>
       </p:ext>
     </p:extLst>
   </p:cSld>
@@ -1658,7 +1658,7 @@
           <p:cNvPr id="2" name="タイトル 1">
             <a:extLst>
               <a:ext uri="{FF2B5EF4-FFF2-40B4-BE49-F238E27FC236}">
-                <a16:creationId xmlns:a16="http://schemas.microsoft.com/office/drawing/2014/main" id="{E98A6CFE-B77C-9B76-2FD1-F6BBA0859BFF}"/>
+                <a16:creationId xmlns:a16="http://schemas.microsoft.com/office/drawing/2014/main" id="{E30E6C4C-B8C3-212B-4667-AA43BC809CF7}"/>
               </a:ext>
             </a:extLst>
           </p:cNvPr>
@@ -1691,7 +1691,7 @@
           <p:cNvPr id="3" name="テキスト プレースホルダー 2">
             <a:extLst>
               <a:ext uri="{FF2B5EF4-FFF2-40B4-BE49-F238E27FC236}">
-                <a16:creationId xmlns:a16="http://schemas.microsoft.com/office/drawing/2014/main" id="{BE91D86C-92A7-E9FE-2590-71E8A07F9320}"/>
+                <a16:creationId xmlns:a16="http://schemas.microsoft.com/office/drawing/2014/main" id="{0235361F-D60E-A87E-327D-D3B663CC5ED1}"/>
               </a:ext>
             </a:extLst>
           </p:cNvPr>
@@ -1762,7 +1762,7 @@
           <p:cNvPr id="4" name="コンテンツ プレースホルダー 3">
             <a:extLst>
               <a:ext uri="{FF2B5EF4-FFF2-40B4-BE49-F238E27FC236}">
-                <a16:creationId xmlns:a16="http://schemas.microsoft.com/office/drawing/2014/main" id="{5D3AA3E5-0665-0106-13ED-F12D8D307BF1}"/>
+                <a16:creationId xmlns:a16="http://schemas.microsoft.com/office/drawing/2014/main" id="{8C7F5433-053C-0094-9ADC-DCCBC92D681D}"/>
               </a:ext>
             </a:extLst>
           </p:cNvPr>
@@ -1856,7 +1856,7 @@
           <p:cNvPr id="5" name="テキスト プレースホルダー 4">
             <a:extLst>
               <a:ext uri="{FF2B5EF4-FFF2-40B4-BE49-F238E27FC236}">
-                <a16:creationId xmlns:a16="http://schemas.microsoft.com/office/drawing/2014/main" id="{A259E8CC-AB0C-7ACD-94E8-49C871DF7330}"/>
+                <a16:creationId xmlns:a16="http://schemas.microsoft.com/office/drawing/2014/main" id="{6298F3F1-6979-2CBD-6F62-CB55BEE22AFF}"/>
               </a:ext>
             </a:extLst>
           </p:cNvPr>
@@ -1927,7 +1927,7 @@
           <p:cNvPr id="6" name="コンテンツ プレースホルダー 5">
             <a:extLst>
               <a:ext uri="{FF2B5EF4-FFF2-40B4-BE49-F238E27FC236}">
-                <a16:creationId xmlns:a16="http://schemas.microsoft.com/office/drawing/2014/main" id="{D11DFFDF-EF2A-FA91-2F41-30CC9A59815E}"/>
+                <a16:creationId xmlns:a16="http://schemas.microsoft.com/office/drawing/2014/main" id="{CD69294D-3A2E-59EA-4714-E53CF6BD158E}"/>
               </a:ext>
             </a:extLst>
           </p:cNvPr>
@@ -2021,7 +2021,7 @@
           <p:cNvPr id="7" name="日付プレースホルダー 6">
             <a:extLst>
               <a:ext uri="{FF2B5EF4-FFF2-40B4-BE49-F238E27FC236}">
-                <a16:creationId xmlns:a16="http://schemas.microsoft.com/office/drawing/2014/main" id="{1CF1601C-B924-C217-A400-5F98B39B6C34}"/>
+                <a16:creationId xmlns:a16="http://schemas.microsoft.com/office/drawing/2014/main" id="{E7A849F2-07EA-3020-B8AA-ACD5F969E639}"/>
               </a:ext>
             </a:extLst>
           </p:cNvPr>
@@ -2037,7 +2037,7 @@
           <a:bodyPr/>
           <a:lstStyle/>
           <a:p>
-            <a:fld id="{5112284A-C95D-47F3-91B2-D34146ECB8CF}" type="datetimeFigureOut">
+            <a:fld id="{C658F508-0733-460D-951D-CAE4D71DB2E5}" type="datetimeFigureOut">
               <a:rPr kumimoji="1" lang="ja-JP" altLang="en-US" smtClean="0"/>
               <a:t>2026/7/30</a:t>
             </a:fld>
@@ -2050,7 +2050,7 @@
           <p:cNvPr id="8" name="フッター プレースホルダー 7">
             <a:extLst>
               <a:ext uri="{FF2B5EF4-FFF2-40B4-BE49-F238E27FC236}">
-                <a16:creationId xmlns:a16="http://schemas.microsoft.com/office/drawing/2014/main" id="{5D41F1AD-BFC3-3980-6D5C-DACBEE48DCE2}"/>
+                <a16:creationId xmlns:a16="http://schemas.microsoft.com/office/drawing/2014/main" id="{8D560F0A-3E0E-0256-4F3D-DFC2F8202B48}"/>
               </a:ext>
             </a:extLst>
           </p:cNvPr>
@@ -2075,7 +2075,7 @@
           <p:cNvPr id="9" name="スライド番号プレースホルダー 8">
             <a:extLst>
               <a:ext uri="{FF2B5EF4-FFF2-40B4-BE49-F238E27FC236}">
-                <a16:creationId xmlns:a16="http://schemas.microsoft.com/office/drawing/2014/main" id="{13A9612C-5915-C345-EDAA-CD2DE838FBBB}"/>
+                <a16:creationId xmlns:a16="http://schemas.microsoft.com/office/drawing/2014/main" id="{DC47F9D2-CE25-4F13-1DD6-59BCF1259199}"/>
               </a:ext>
             </a:extLst>
           </p:cNvPr>
@@ -2091,7 +2091,7 @@
           <a:bodyPr/>
           <a:lstStyle/>
           <a:p>
-            <a:fld id="{C23EBC2A-0C05-4802-9AAF-93E32E64FFA0}" type="slidenum">
+            <a:fld id="{17F59BEA-6BA2-4D82-AA5B-D813974AA8FE}" type="slidenum">
               <a:rPr kumimoji="1" lang="ja-JP" altLang="en-US" smtClean="0"/>
               <a:t>‹#›</a:t>
             </a:fld>
@@ -2102,7 +2102,7 @@
     </p:spTree>
     <p:extLst>
       <p:ext uri="{BB962C8B-B14F-4D97-AF65-F5344CB8AC3E}">
-        <p14:creationId xmlns:p14="http://schemas.microsoft.com/office/powerpoint/2010/main" val="1903718423"/>
+        <p14:creationId xmlns:p14="http://schemas.microsoft.com/office/powerpoint/2010/main" val="3791508519"/>
       </p:ext>
     </p:extLst>
   </p:cSld>
@@ -2134,7 +2134,7 @@
           <p:cNvPr id="2" name="タイトル 1">
             <a:extLst>
               <a:ext uri="{FF2B5EF4-FFF2-40B4-BE49-F238E27FC236}">
-                <a16:creationId xmlns:a16="http://schemas.microsoft.com/office/drawing/2014/main" id="{93C4D33D-1F50-798B-5BB5-75BD0EF6A3FF}"/>
+                <a16:creationId xmlns:a16="http://schemas.microsoft.com/office/drawing/2014/main" id="{8846FC61-F416-07AE-F1B6-3415CAAC4A69}"/>
               </a:ext>
             </a:extLst>
           </p:cNvPr>
@@ -2162,7 +2162,7 @@
           <p:cNvPr id="3" name="日付プレースホルダー 2">
             <a:extLst>
               <a:ext uri="{FF2B5EF4-FFF2-40B4-BE49-F238E27FC236}">
-                <a16:creationId xmlns:a16="http://schemas.microsoft.com/office/drawing/2014/main" id="{7CC25913-B4C9-692C-31A8-C80359A0749E}"/>
+                <a16:creationId xmlns:a16="http://schemas.microsoft.com/office/drawing/2014/main" id="{BC922156-5858-764D-19F8-CF8437A2EEC2}"/>
               </a:ext>
             </a:extLst>
           </p:cNvPr>
@@ -2178,7 +2178,7 @@
           <a:bodyPr/>
           <a:lstStyle/>
           <a:p>
-            <a:fld id="{5112284A-C95D-47F3-91B2-D34146ECB8CF}" type="datetimeFigureOut">
+            <a:fld id="{C658F508-0733-460D-951D-CAE4D71DB2E5}" type="datetimeFigureOut">
               <a:rPr kumimoji="1" lang="ja-JP" altLang="en-US" smtClean="0"/>
               <a:t>2026/7/30</a:t>
             </a:fld>
@@ -2191,7 +2191,7 @@
           <p:cNvPr id="4" name="フッター プレースホルダー 3">
             <a:extLst>
               <a:ext uri="{FF2B5EF4-FFF2-40B4-BE49-F238E27FC236}">
-                <a16:creationId xmlns:a16="http://schemas.microsoft.com/office/drawing/2014/main" id="{9E1DAE07-0D6B-E7DF-E155-51C38BD4E992}"/>
+                <a16:creationId xmlns:a16="http://schemas.microsoft.com/office/drawing/2014/main" id="{0F32F472-6068-C57A-4986-F55A5063669F}"/>
               </a:ext>
             </a:extLst>
           </p:cNvPr>
@@ -2216,7 +2216,7 @@
           <p:cNvPr id="5" name="スライド番号プレースホルダー 4">
             <a:extLst>
               <a:ext uri="{FF2B5EF4-FFF2-40B4-BE49-F238E27FC236}">
-                <a16:creationId xmlns:a16="http://schemas.microsoft.com/office/drawing/2014/main" id="{9A5518B1-D274-876F-FEF6-20920F866C98}"/>
+                <a16:creationId xmlns:a16="http://schemas.microsoft.com/office/drawing/2014/main" id="{843052E5-2603-E83C-934A-4B757E7BB95B}"/>
               </a:ext>
             </a:extLst>
           </p:cNvPr>
@@ -2232,7 +2232,7 @@
           <a:bodyPr/>
           <a:lstStyle/>
           <a:p>
-            <a:fld id="{C23EBC2A-0C05-4802-9AAF-93E32E64FFA0}" type="slidenum">
+            <a:fld id="{17F59BEA-6BA2-4D82-AA5B-D813974AA8FE}" type="slidenum">
               <a:rPr kumimoji="1" lang="ja-JP" altLang="en-US" smtClean="0"/>
               <a:t>‹#›</a:t>
             </a:fld>
@@ -2243,7 +2243,7 @@
     </p:spTree>
     <p:extLst>
       <p:ext uri="{BB962C8B-B14F-4D97-AF65-F5344CB8AC3E}">
-        <p14:creationId xmlns:p14="http://schemas.microsoft.com/office/powerpoint/2010/main" val="3815909621"/>
+        <p14:creationId xmlns:p14="http://schemas.microsoft.com/office/powerpoint/2010/main" val="1242376541"/>
       </p:ext>
     </p:extLst>
   </p:cSld>
@@ -2275,7 +2275,7 @@
           <p:cNvPr id="2" name="日付プレースホルダー 1">
             <a:extLst>
               <a:ext uri="{FF2B5EF4-FFF2-40B4-BE49-F238E27FC236}">
-                <a16:creationId xmlns:a16="http://schemas.microsoft.com/office/drawing/2014/main" id="{63675072-861A-586E-2A74-20EADAF6B1E9}"/>
+                <a16:creationId xmlns:a16="http://schemas.microsoft.com/office/drawing/2014/main" id="{2F4B51ED-FF2E-5D18-5C97-DC0DB9DC45CE}"/>
               </a:ext>
             </a:extLst>
           </p:cNvPr>
@@ -2291,7 +2291,7 @@
           <a:bodyPr/>
           <a:lstStyle/>
           <a:p>
-            <a:fld id="{5112284A-C95D-47F3-91B2-D34146ECB8CF}" type="datetimeFigureOut">
+            <a:fld id="{C658F508-0733-460D-951D-CAE4D71DB2E5}" type="datetimeFigureOut">
               <a:rPr kumimoji="1" lang="ja-JP" altLang="en-US" smtClean="0"/>
               <a:t>2026/7/30</a:t>
             </a:fld>
@@ -2304,7 +2304,7 @@
           <p:cNvPr id="3" name="フッター プレースホルダー 2">
             <a:extLst>
               <a:ext uri="{FF2B5EF4-FFF2-40B4-BE49-F238E27FC236}">
-                <a16:creationId xmlns:a16="http://schemas.microsoft.com/office/drawing/2014/main" id="{F500ECC4-08E6-ECA3-39A4-40C70C207C93}"/>
+                <a16:creationId xmlns:a16="http://schemas.microsoft.com/office/drawing/2014/main" id="{A477FC34-925F-BDE4-3FD4-0B76D2F8E48D}"/>
               </a:ext>
             </a:extLst>
           </p:cNvPr>
@@ -2329,7 +2329,7 @@
           <p:cNvPr id="4" name="スライド番号プレースホルダー 3">
             <a:extLst>
               <a:ext uri="{FF2B5EF4-FFF2-40B4-BE49-F238E27FC236}">
-                <a16:creationId xmlns:a16="http://schemas.microsoft.com/office/drawing/2014/main" id="{AE9397EF-14E7-FAD4-420C-DA7646974F6F}"/>
+                <a16:creationId xmlns:a16="http://schemas.microsoft.com/office/drawing/2014/main" id="{5EA92383-0767-9ADD-E16D-EBFD214F5958}"/>
               </a:ext>
             </a:extLst>
           </p:cNvPr>
@@ -2345,7 +2345,7 @@
           <a:bodyPr/>
           <a:lstStyle/>
           <a:p>
-            <a:fld id="{C23EBC2A-0C05-4802-9AAF-93E32E64FFA0}" type="slidenum">
+            <a:fld id="{17F59BEA-6BA2-4D82-AA5B-D813974AA8FE}" type="slidenum">
               <a:rPr kumimoji="1" lang="ja-JP" altLang="en-US" smtClean="0"/>
               <a:t>‹#›</a:t>
             </a:fld>
@@ -2356,7 +2356,7 @@
     </p:spTree>
     <p:extLst>
       <p:ext uri="{BB962C8B-B14F-4D97-AF65-F5344CB8AC3E}">
-        <p14:creationId xmlns:p14="http://schemas.microsoft.com/office/powerpoint/2010/main" val="35264068"/>
+        <p14:creationId xmlns:p14="http://schemas.microsoft.com/office/powerpoint/2010/main" val="1131925634"/>
       </p:ext>
     </p:extLst>
   </p:cSld>
@@ -2388,7 +2388,7 @@
           <p:cNvPr id="2" name="タイトル 1">
             <a:extLst>
               <a:ext uri="{FF2B5EF4-FFF2-40B4-BE49-F238E27FC236}">
-                <a16:creationId xmlns:a16="http://schemas.microsoft.com/office/drawing/2014/main" id="{E7844CEC-5CCE-073F-AD75-F46C48061660}"/>
+                <a16:creationId xmlns:a16="http://schemas.microsoft.com/office/drawing/2014/main" id="{1B5576FD-B353-4581-B3A7-172BAF2CF39A}"/>
               </a:ext>
             </a:extLst>
           </p:cNvPr>
@@ -2425,7 +2425,7 @@
           <p:cNvPr id="3" name="コンテンツ プレースホルダー 2">
             <a:extLst>
               <a:ext uri="{FF2B5EF4-FFF2-40B4-BE49-F238E27FC236}">
-                <a16:creationId xmlns:a16="http://schemas.microsoft.com/office/drawing/2014/main" id="{88B89692-7C8C-2D56-9026-F5DC59517DC7}"/>
+                <a16:creationId xmlns:a16="http://schemas.microsoft.com/office/drawing/2014/main" id="{EF72A4FF-B875-CFCD-1F3C-C18FD8303F45}"/>
               </a:ext>
             </a:extLst>
           </p:cNvPr>
@@ -2547,7 +2547,7 @@
           <p:cNvPr id="4" name="テキスト プレースホルダー 3">
             <a:extLst>
               <a:ext uri="{FF2B5EF4-FFF2-40B4-BE49-F238E27FC236}">
-                <a16:creationId xmlns:a16="http://schemas.microsoft.com/office/drawing/2014/main" id="{531B65FA-E4E9-D910-6F20-A1E3EB3FFD8A}"/>
+                <a16:creationId xmlns:a16="http://schemas.microsoft.com/office/drawing/2014/main" id="{64EBA0A4-8934-F56B-4C28-4525314D3668}"/>
               </a:ext>
             </a:extLst>
           </p:cNvPr>
@@ -2618,7 +2618,7 @@
           <p:cNvPr id="5" name="日付プレースホルダー 4">
             <a:extLst>
               <a:ext uri="{FF2B5EF4-FFF2-40B4-BE49-F238E27FC236}">
-                <a16:creationId xmlns:a16="http://schemas.microsoft.com/office/drawing/2014/main" id="{D1A3C21D-7418-1705-33E0-0359D4DBDD89}"/>
+                <a16:creationId xmlns:a16="http://schemas.microsoft.com/office/drawing/2014/main" id="{44819278-741D-8DBA-FCDC-67F2EA24CD1E}"/>
               </a:ext>
             </a:extLst>
           </p:cNvPr>
@@ -2634,7 +2634,7 @@
           <a:bodyPr/>
           <a:lstStyle/>
           <a:p>
-            <a:fld id="{5112284A-C95D-47F3-91B2-D34146ECB8CF}" type="datetimeFigureOut">
+            <a:fld id="{C658F508-0733-460D-951D-CAE4D71DB2E5}" type="datetimeFigureOut">
               <a:rPr kumimoji="1" lang="ja-JP" altLang="en-US" smtClean="0"/>
               <a:t>2026/7/30</a:t>
             </a:fld>
@@ -2647,7 +2647,7 @@
           <p:cNvPr id="6" name="フッター プレースホルダー 5">
             <a:extLst>
               <a:ext uri="{FF2B5EF4-FFF2-40B4-BE49-F238E27FC236}">
-                <a16:creationId xmlns:a16="http://schemas.microsoft.com/office/drawing/2014/main" id="{6F76D944-34E9-3141-33D4-90CD507F50C0}"/>
+                <a16:creationId xmlns:a16="http://schemas.microsoft.com/office/drawing/2014/main" id="{085BE495-D600-A619-9560-12559FB0BA48}"/>
               </a:ext>
             </a:extLst>
           </p:cNvPr>
@@ -2672,7 +2672,7 @@
           <p:cNvPr id="7" name="スライド番号プレースホルダー 6">
             <a:extLst>
               <a:ext uri="{FF2B5EF4-FFF2-40B4-BE49-F238E27FC236}">
-                <a16:creationId xmlns:a16="http://schemas.microsoft.com/office/drawing/2014/main" id="{FC1669B1-504F-AF4B-63F5-A7302E6C8940}"/>
+                <a16:creationId xmlns:a16="http://schemas.microsoft.com/office/drawing/2014/main" id="{5BEF967D-5121-3479-B8E5-119DDDF91A89}"/>
               </a:ext>
             </a:extLst>
           </p:cNvPr>
@@ -2688,7 +2688,7 @@
           <a:bodyPr/>
           <a:lstStyle/>
           <a:p>
-            <a:fld id="{C23EBC2A-0C05-4802-9AAF-93E32E64FFA0}" type="slidenum">
+            <a:fld id="{17F59BEA-6BA2-4D82-AA5B-D813974AA8FE}" type="slidenum">
               <a:rPr kumimoji="1" lang="ja-JP" altLang="en-US" smtClean="0"/>
               <a:t>‹#›</a:t>
             </a:fld>
@@ -2699,7 +2699,7 @@
     </p:spTree>
     <p:extLst>
       <p:ext uri="{BB962C8B-B14F-4D97-AF65-F5344CB8AC3E}">
-        <p14:creationId xmlns:p14="http://schemas.microsoft.com/office/powerpoint/2010/main" val="2325869309"/>
+        <p14:creationId xmlns:p14="http://schemas.microsoft.com/office/powerpoint/2010/main" val="2287500461"/>
       </p:ext>
     </p:extLst>
   </p:cSld>
@@ -2731,7 +2731,7 @@
           <p:cNvPr id="2" name="タイトル 1">
             <a:extLst>
               <a:ext uri="{FF2B5EF4-FFF2-40B4-BE49-F238E27FC236}">
-                <a16:creationId xmlns:a16="http://schemas.microsoft.com/office/drawing/2014/main" id="{11C73846-4E2A-7B31-C9B5-C16D8A4512E6}"/>
+                <a16:creationId xmlns:a16="http://schemas.microsoft.com/office/drawing/2014/main" id="{A1A0A516-B773-9D83-E7DA-9EA09CF5547D}"/>
               </a:ext>
             </a:extLst>
           </p:cNvPr>
@@ -2768,7 +2768,7 @@
           <p:cNvPr id="3" name="図プレースホルダー 2">
             <a:extLst>
               <a:ext uri="{FF2B5EF4-FFF2-40B4-BE49-F238E27FC236}">
-                <a16:creationId xmlns:a16="http://schemas.microsoft.com/office/drawing/2014/main" id="{251E56F7-9466-A3D4-33C4-445B56F939C2}"/>
+                <a16:creationId xmlns:a16="http://schemas.microsoft.com/office/drawing/2014/main" id="{FB215720-99A7-007D-8979-AF50DCBA7C70}"/>
               </a:ext>
             </a:extLst>
           </p:cNvPr>
@@ -2835,7 +2835,7 @@
           <p:cNvPr id="4" name="テキスト プレースホルダー 3">
             <a:extLst>
               <a:ext uri="{FF2B5EF4-FFF2-40B4-BE49-F238E27FC236}">
-                <a16:creationId xmlns:a16="http://schemas.microsoft.com/office/drawing/2014/main" id="{F9A926EB-82D4-5521-C7F4-FE50FD033C5A}"/>
+                <a16:creationId xmlns:a16="http://schemas.microsoft.com/office/drawing/2014/main" id="{9DDC1904-A1F1-A4E0-6E7B-DA52AD1C10C8}"/>
               </a:ext>
             </a:extLst>
           </p:cNvPr>
@@ -2906,7 +2906,7 @@
           <p:cNvPr id="5" name="日付プレースホルダー 4">
             <a:extLst>
               <a:ext uri="{FF2B5EF4-FFF2-40B4-BE49-F238E27FC236}">
-                <a16:creationId xmlns:a16="http://schemas.microsoft.com/office/drawing/2014/main" id="{0CCC6F50-4A2D-EAFC-5844-71A349917525}"/>
+                <a16:creationId xmlns:a16="http://schemas.microsoft.com/office/drawing/2014/main" id="{EE1683D1-D4B1-1D04-D217-48DCE653243F}"/>
               </a:ext>
             </a:extLst>
           </p:cNvPr>
@@ -2922,7 +2922,7 @@
           <a:bodyPr/>
           <a:lstStyle/>
           <a:p>
-            <a:fld id="{5112284A-C95D-47F3-91B2-D34146ECB8CF}" type="datetimeFigureOut">
+            <a:fld id="{C658F508-0733-460D-951D-CAE4D71DB2E5}" type="datetimeFigureOut">
               <a:rPr kumimoji="1" lang="ja-JP" altLang="en-US" smtClean="0"/>
               <a:t>2026/7/30</a:t>
             </a:fld>
@@ -2935,7 +2935,7 @@
           <p:cNvPr id="6" name="フッター プレースホルダー 5">
             <a:extLst>
               <a:ext uri="{FF2B5EF4-FFF2-40B4-BE49-F238E27FC236}">
-                <a16:creationId xmlns:a16="http://schemas.microsoft.com/office/drawing/2014/main" id="{A87A638D-B63A-BE9D-418D-509AE368937D}"/>
+                <a16:creationId xmlns:a16="http://schemas.microsoft.com/office/drawing/2014/main" id="{7952B866-81F3-72F3-FCA1-FFE1C79B6DEE}"/>
               </a:ext>
             </a:extLst>
           </p:cNvPr>
@@ -2960,7 +2960,7 @@
           <p:cNvPr id="7" name="スライド番号プレースホルダー 6">
             <a:extLst>
               <a:ext uri="{FF2B5EF4-FFF2-40B4-BE49-F238E27FC236}">
-                <a16:creationId xmlns:a16="http://schemas.microsoft.com/office/drawing/2014/main" id="{3FFA6B63-544B-F4DB-3116-15734111D900}"/>
+                <a16:creationId xmlns:a16="http://schemas.microsoft.com/office/drawing/2014/main" id="{804D120A-223F-0247-CA5A-4778EBAF46E5}"/>
               </a:ext>
             </a:extLst>
           </p:cNvPr>
@@ -2976,7 +2976,7 @@
           <a:bodyPr/>
           <a:lstStyle/>
           <a:p>
-            <a:fld id="{C23EBC2A-0C05-4802-9AAF-93E32E64FFA0}" type="slidenum">
+            <a:fld id="{17F59BEA-6BA2-4D82-AA5B-D813974AA8FE}" type="slidenum">
               <a:rPr kumimoji="1" lang="ja-JP" altLang="en-US" smtClean="0"/>
               <a:t>‹#›</a:t>
             </a:fld>
@@ -2987,7 +2987,7 @@
     </p:spTree>
     <p:extLst>
       <p:ext uri="{BB962C8B-B14F-4D97-AF65-F5344CB8AC3E}">
-        <p14:creationId xmlns:p14="http://schemas.microsoft.com/office/powerpoint/2010/main" val="3464853696"/>
+        <p14:creationId xmlns:p14="http://schemas.microsoft.com/office/powerpoint/2010/main" val="4093683665"/>
       </p:ext>
     </p:extLst>
   </p:cSld>
@@ -3024,7 +3024,7 @@
           <p:cNvPr id="2" name="タイトル プレースホルダー 1">
             <a:extLst>
               <a:ext uri="{FF2B5EF4-FFF2-40B4-BE49-F238E27FC236}">
-                <a16:creationId xmlns:a16="http://schemas.microsoft.com/office/drawing/2014/main" id="{0E302A4F-88C3-B442-F090-7D88F54AD5AA}"/>
+                <a16:creationId xmlns:a16="http://schemas.microsoft.com/office/drawing/2014/main" id="{6641EAA9-D5FD-F877-DCB2-704A3A999617}"/>
               </a:ext>
             </a:extLst>
           </p:cNvPr>
@@ -3062,7 +3062,7 @@
           <p:cNvPr id="3" name="テキスト プレースホルダー 2">
             <a:extLst>
               <a:ext uri="{FF2B5EF4-FFF2-40B4-BE49-F238E27FC236}">
-                <a16:creationId xmlns:a16="http://schemas.microsoft.com/office/drawing/2014/main" id="{AA540F3B-BE1B-0407-4B9E-92B9A86E05D1}"/>
+                <a16:creationId xmlns:a16="http://schemas.microsoft.com/office/drawing/2014/main" id="{5D6C633B-8B02-2135-B4EC-F76249922AF7}"/>
               </a:ext>
             </a:extLst>
           </p:cNvPr>
@@ -3161,7 +3161,7 @@
           <p:cNvPr id="4" name="日付プレースホルダー 3">
             <a:extLst>
               <a:ext uri="{FF2B5EF4-FFF2-40B4-BE49-F238E27FC236}">
-                <a16:creationId xmlns:a16="http://schemas.microsoft.com/office/drawing/2014/main" id="{0E753D9C-F64C-5AB3-D250-8E81652DACE6}"/>
+                <a16:creationId xmlns:a16="http://schemas.microsoft.com/office/drawing/2014/main" id="{36FD4782-3AB9-7973-0640-4FD274B8E84F}"/>
               </a:ext>
             </a:extLst>
           </p:cNvPr>
@@ -3195,7 +3195,7 @@
             </a:lvl1pPr>
           </a:lstStyle>
           <a:p>
-            <a:fld id="{5112284A-C95D-47F3-91B2-D34146ECB8CF}" type="datetimeFigureOut">
+            <a:fld id="{C658F508-0733-460D-951D-CAE4D71DB2E5}" type="datetimeFigureOut">
               <a:rPr kumimoji="1" lang="ja-JP" altLang="en-US" smtClean="0"/>
               <a:t>2026/7/30</a:t>
             </a:fld>
@@ -3208,7 +3208,7 @@
           <p:cNvPr id="5" name="フッター プレースホルダー 4">
             <a:extLst>
               <a:ext uri="{FF2B5EF4-FFF2-40B4-BE49-F238E27FC236}">
-                <a16:creationId xmlns:a16="http://schemas.microsoft.com/office/drawing/2014/main" id="{CA908237-6FB5-067B-2A9E-9716996C6BF0}"/>
+                <a16:creationId xmlns:a16="http://schemas.microsoft.com/office/drawing/2014/main" id="{2E36850A-341A-5B9F-F58B-1E718D325218}"/>
               </a:ext>
             </a:extLst>
           </p:cNvPr>
@@ -3251,7 +3251,7 @@
           <p:cNvPr id="6" name="スライド番号プレースホルダー 5">
             <a:extLst>
               <a:ext uri="{FF2B5EF4-FFF2-40B4-BE49-F238E27FC236}">
-                <a16:creationId xmlns:a16="http://schemas.microsoft.com/office/drawing/2014/main" id="{F6605C70-1AAC-08F7-E637-DB72157971A3}"/>
+                <a16:creationId xmlns:a16="http://schemas.microsoft.com/office/drawing/2014/main" id="{970C1B19-3A7E-DC06-FF6A-47D0C7E7028A}"/>
               </a:ext>
             </a:extLst>
           </p:cNvPr>
@@ -3285,7 +3285,7 @@
             </a:lvl1pPr>
           </a:lstStyle>
           <a:p>
-            <a:fld id="{C23EBC2A-0C05-4802-9AAF-93E32E64FFA0}" type="slidenum">
+            <a:fld id="{17F59BEA-6BA2-4D82-AA5B-D813974AA8FE}" type="slidenum">
               <a:rPr kumimoji="1" lang="ja-JP" altLang="en-US" smtClean="0"/>
               <a:t>‹#›</a:t>
             </a:fld>
@@ -3296,7 +3296,7 @@
     </p:spTree>
     <p:extLst>
       <p:ext uri="{BB962C8B-B14F-4D97-AF65-F5344CB8AC3E}">
-        <p14:creationId xmlns:p14="http://schemas.microsoft.com/office/powerpoint/2010/main" val="8612049"/>
+        <p14:creationId xmlns:p14="http://schemas.microsoft.com/office/powerpoint/2010/main" val="171717178"/>
       </p:ext>
     </p:extLst>
   </p:cSld>
@@ -3619,7 +3619,7 @@
           <p:cNvPr id="2" name="テキスト ボックス 1">
             <a:extLst>
               <a:ext uri="{FF2B5EF4-FFF2-40B4-BE49-F238E27FC236}">
-                <a16:creationId xmlns:a16="http://schemas.microsoft.com/office/drawing/2014/main" id="{08A62EAC-1390-24DE-ED19-8789F879FA29}"/>
+                <a16:creationId xmlns:a16="http://schemas.microsoft.com/office/drawing/2014/main" id="{39C32828-A24D-60DA-8C48-9791ADA6A40D}"/>
               </a:ext>
             </a:extLst>
           </p:cNvPr>
@@ -3665,7 +3665,7 @@
           <p:cNvPr id="3" name="テキスト ボックス 2">
             <a:extLst>
               <a:ext uri="{FF2B5EF4-FFF2-40B4-BE49-F238E27FC236}">
-                <a16:creationId xmlns:a16="http://schemas.microsoft.com/office/drawing/2014/main" id="{E33DD947-C3EB-43ED-B9C2-E6596ECA892A}"/>
+                <a16:creationId xmlns:a16="http://schemas.microsoft.com/office/drawing/2014/main" id="{2441F007-1FE2-2335-F362-94ACAC2B694C}"/>
               </a:ext>
             </a:extLst>
           </p:cNvPr>
@@ -3714,7 +3714,7 @@
           <p:cNvPr id="4" name="テキスト ボックス 3">
             <a:extLst>
               <a:ext uri="{FF2B5EF4-FFF2-40B4-BE49-F238E27FC236}">
-                <a16:creationId xmlns:a16="http://schemas.microsoft.com/office/drawing/2014/main" id="{162F218C-8F8A-6A6C-55CA-6CB9D331F7C8}"/>
+                <a16:creationId xmlns:a16="http://schemas.microsoft.com/office/drawing/2014/main" id="{41AD1FBB-EFE3-5C6A-D95F-05EA570076E8}"/>
               </a:ext>
             </a:extLst>
           </p:cNvPr>
@@ -3754,7 +3754,7 @@
           <p:cNvPr id="5" name="テキスト ボックス 4">
             <a:extLst>
               <a:ext uri="{FF2B5EF4-FFF2-40B4-BE49-F238E27FC236}">
-                <a16:creationId xmlns:a16="http://schemas.microsoft.com/office/drawing/2014/main" id="{26D55C17-84BA-0446-0040-0242299D4F1F}"/>
+                <a16:creationId xmlns:a16="http://schemas.microsoft.com/office/drawing/2014/main" id="{1D26E491-FD5A-CF9D-0C3E-0AE0F857A7CB}"/>
               </a:ext>
             </a:extLst>
           </p:cNvPr>
@@ -3801,7 +3801,7 @@
             <a:hlinkClick r:id="" action="ppaction://media"/>
             <a:extLst>
               <a:ext uri="{FF2B5EF4-FFF2-40B4-BE49-F238E27FC236}">
-                <a16:creationId xmlns:a16="http://schemas.microsoft.com/office/drawing/2014/main" id="{CC3B4740-5657-C97D-AB57-132964F66608}"/>
+                <a16:creationId xmlns:a16="http://schemas.microsoft.com/office/drawing/2014/main" id="{5E070494-55FF-6270-EB80-75576B7B33E7}"/>
               </a:ext>
             </a:extLst>
           </p:cNvPr>
@@ -3836,7 +3836,7 @@
     </p:spTree>
     <p:extLst>
       <p:ext uri="{BB962C8B-B14F-4D97-AF65-F5344CB8AC3E}">
-        <p14:creationId xmlns:p14="http://schemas.microsoft.com/office/powerpoint/2010/main" val="1465288283"/>
+        <p14:creationId xmlns:p14="http://schemas.microsoft.com/office/powerpoint/2010/main" val="1793152038"/>
       </p:ext>
     </p:extLst>
   </p:cSld>
@@ -3960,7 +3960,7 @@
           <p:cNvPr id="2" name="テキスト ボックス 1">
             <a:extLst>
               <a:ext uri="{FF2B5EF4-FFF2-40B4-BE49-F238E27FC236}">
-                <a16:creationId xmlns:a16="http://schemas.microsoft.com/office/drawing/2014/main" id="{39BB05A9-47C1-5464-499C-FA4C6047919F}"/>
+                <a16:creationId xmlns:a16="http://schemas.microsoft.com/office/drawing/2014/main" id="{4D78E8CD-2CCF-B6F4-0C71-1B594B3A206C}"/>
               </a:ext>
             </a:extLst>
           </p:cNvPr>
@@ -4006,7 +4006,7 @@
           <p:cNvPr id="3" name="テキスト ボックス 2">
             <a:extLst>
               <a:ext uri="{FF2B5EF4-FFF2-40B4-BE49-F238E27FC236}">
-                <a16:creationId xmlns:a16="http://schemas.microsoft.com/office/drawing/2014/main" id="{3E38CEFE-958B-311F-7D81-9111E36C3ECB}"/>
+                <a16:creationId xmlns:a16="http://schemas.microsoft.com/office/drawing/2014/main" id="{D659063E-CCE7-E6E1-D59D-AC2E72D14792}"/>
               </a:ext>
             </a:extLst>
           </p:cNvPr>
@@ -4046,7 +4046,7 @@
           <p:cNvPr id="4" name="テキスト ボックス 3">
             <a:extLst>
               <a:ext uri="{FF2B5EF4-FFF2-40B4-BE49-F238E27FC236}">
-                <a16:creationId xmlns:a16="http://schemas.microsoft.com/office/drawing/2014/main" id="{C5F92751-93A5-4292-CD5D-49254D08C5FA}"/>
+                <a16:creationId xmlns:a16="http://schemas.microsoft.com/office/drawing/2014/main" id="{8157B3C5-337C-1051-D47C-0A5B72DDF3C5}"/>
               </a:ext>
             </a:extLst>
           </p:cNvPr>
@@ -4095,7 +4095,7 @@
           <p:cNvPr id="5" name="テキスト ボックス 4">
             <a:extLst>
               <a:ext uri="{FF2B5EF4-FFF2-40B4-BE49-F238E27FC236}">
-                <a16:creationId xmlns:a16="http://schemas.microsoft.com/office/drawing/2014/main" id="{E2A4B590-6DAD-EB65-B43F-590BA4EDBD71}"/>
+                <a16:creationId xmlns:a16="http://schemas.microsoft.com/office/drawing/2014/main" id="{2A09EDD9-3A89-6FD5-822E-C31A88784918}"/>
               </a:ext>
             </a:extLst>
           </p:cNvPr>
@@ -4142,7 +4142,7 @@
             <a:hlinkClick r:id="" action="ppaction://media"/>
             <a:extLst>
               <a:ext uri="{FF2B5EF4-FFF2-40B4-BE49-F238E27FC236}">
-                <a16:creationId xmlns:a16="http://schemas.microsoft.com/office/drawing/2014/main" id="{3B3F8AE9-FCCE-CCA1-6F4F-9E55A4A97A93}"/>
+                <a16:creationId xmlns:a16="http://schemas.microsoft.com/office/drawing/2014/main" id="{0F5ECB3F-EEA4-DEA0-ECB0-B1BF79E315FF}"/>
               </a:ext>
             </a:extLst>
           </p:cNvPr>
@@ -4177,7 +4177,7 @@
     </p:spTree>
     <p:extLst>
       <p:ext uri="{BB962C8B-B14F-4D97-AF65-F5344CB8AC3E}">
-        <p14:creationId xmlns:p14="http://schemas.microsoft.com/office/powerpoint/2010/main" val="1466116781"/>
+        <p14:creationId xmlns:p14="http://schemas.microsoft.com/office/powerpoint/2010/main" val="2417993199"/>
       </p:ext>
     </p:extLst>
   </p:cSld>
@@ -4301,7 +4301,7 @@
           <p:cNvPr id="2" name="テキスト ボックス 1">
             <a:extLst>
               <a:ext uri="{FF2B5EF4-FFF2-40B4-BE49-F238E27FC236}">
-                <a16:creationId xmlns:a16="http://schemas.microsoft.com/office/drawing/2014/main" id="{C85FF129-3BD5-8912-90EF-3EE5E09F5666}"/>
+                <a16:creationId xmlns:a16="http://schemas.microsoft.com/office/drawing/2014/main" id="{8471274E-F6DB-969C-C82D-9964B41DE8B8}"/>
               </a:ext>
             </a:extLst>
           </p:cNvPr>
@@ -4347,7 +4347,7 @@
           <p:cNvPr id="3" name="テキスト ボックス 2">
             <a:extLst>
               <a:ext uri="{FF2B5EF4-FFF2-40B4-BE49-F238E27FC236}">
-                <a16:creationId xmlns:a16="http://schemas.microsoft.com/office/drawing/2014/main" id="{A0786AF1-0F22-B3F3-A93F-95A284F432A2}"/>
+                <a16:creationId xmlns:a16="http://schemas.microsoft.com/office/drawing/2014/main" id="{1475D00E-4FC7-A32C-2134-2513841E846F}"/>
               </a:ext>
             </a:extLst>
           </p:cNvPr>
@@ -4387,7 +4387,7 @@
           <p:cNvPr id="4" name="テキスト ボックス 3">
             <a:extLst>
               <a:ext uri="{FF2B5EF4-FFF2-40B4-BE49-F238E27FC236}">
-                <a16:creationId xmlns:a16="http://schemas.microsoft.com/office/drawing/2014/main" id="{FFC26A2E-7AE6-F7F1-BD0E-EE5E7C432329}"/>
+                <a16:creationId xmlns:a16="http://schemas.microsoft.com/office/drawing/2014/main" id="{6BD0C9D3-7345-05C8-94B2-F92D82295336}"/>
               </a:ext>
             </a:extLst>
           </p:cNvPr>
@@ -4464,7 +4464,7 @@
           <p:cNvPr id="5" name="テキスト ボックス 4">
             <a:extLst>
               <a:ext uri="{FF2B5EF4-FFF2-40B4-BE49-F238E27FC236}">
-                <a16:creationId xmlns:a16="http://schemas.microsoft.com/office/drawing/2014/main" id="{8F0D272D-265D-358E-F2EC-3A644F9BD4BF}"/>
+                <a16:creationId xmlns:a16="http://schemas.microsoft.com/office/drawing/2014/main" id="{7192D7F9-2572-90BE-5C30-19CE724F7583}"/>
               </a:ext>
             </a:extLst>
           </p:cNvPr>
@@ -4511,7 +4511,7 @@
             <a:hlinkClick r:id="" action="ppaction://media"/>
             <a:extLst>
               <a:ext uri="{FF2B5EF4-FFF2-40B4-BE49-F238E27FC236}">
-                <a16:creationId xmlns:a16="http://schemas.microsoft.com/office/drawing/2014/main" id="{F5079B7A-9FC1-16BA-F545-FF5B409F64B9}"/>
+                <a16:creationId xmlns:a16="http://schemas.microsoft.com/office/drawing/2014/main" id="{52F79BFB-8F81-A7C6-0E6D-D97D820FCBF5}"/>
               </a:ext>
             </a:extLst>
           </p:cNvPr>
@@ -4546,7 +4546,7 @@
     </p:spTree>
     <p:extLst>
       <p:ext uri="{BB962C8B-B14F-4D97-AF65-F5344CB8AC3E}">
-        <p14:creationId xmlns:p14="http://schemas.microsoft.com/office/powerpoint/2010/main" val="716904140"/>
+        <p14:creationId xmlns:p14="http://schemas.microsoft.com/office/powerpoint/2010/main" val="425767978"/>
       </p:ext>
     </p:extLst>
   </p:cSld>
@@ -4670,7 +4670,7 @@
           <p:cNvPr id="2" name="テキスト ボックス 1">
             <a:extLst>
               <a:ext uri="{FF2B5EF4-FFF2-40B4-BE49-F238E27FC236}">
-                <a16:creationId xmlns:a16="http://schemas.microsoft.com/office/drawing/2014/main" id="{212521B7-8679-4F69-6DB2-363BF7A92E72}"/>
+                <a16:creationId xmlns:a16="http://schemas.microsoft.com/office/drawing/2014/main" id="{4DCA817C-7383-3174-1873-70C81EE584C4}"/>
               </a:ext>
             </a:extLst>
           </p:cNvPr>
@@ -4716,7 +4716,7 @@
           <p:cNvPr id="3" name="テキスト ボックス 2">
             <a:extLst>
               <a:ext uri="{FF2B5EF4-FFF2-40B4-BE49-F238E27FC236}">
-                <a16:creationId xmlns:a16="http://schemas.microsoft.com/office/drawing/2014/main" id="{606AFA80-15B6-7C6E-4F6A-F4D32DE91CB7}"/>
+                <a16:creationId xmlns:a16="http://schemas.microsoft.com/office/drawing/2014/main" id="{DF159350-EBFE-76DA-53E5-167C1E871280}"/>
               </a:ext>
             </a:extLst>
           </p:cNvPr>
@@ -4756,7 +4756,7 @@
           <p:cNvPr id="4" name="テキスト ボックス 3">
             <a:extLst>
               <a:ext uri="{FF2B5EF4-FFF2-40B4-BE49-F238E27FC236}">
-                <a16:creationId xmlns:a16="http://schemas.microsoft.com/office/drawing/2014/main" id="{247059C6-CEA2-D502-213B-BF9BFA18568B}"/>
+                <a16:creationId xmlns:a16="http://schemas.microsoft.com/office/drawing/2014/main" id="{D7163C0D-69AA-E73D-2009-3CB428F93EE2}"/>
               </a:ext>
             </a:extLst>
           </p:cNvPr>
@@ -4866,7 +4866,7 @@
           <p:cNvPr id="5" name="テキスト ボックス 4">
             <a:extLst>
               <a:ext uri="{FF2B5EF4-FFF2-40B4-BE49-F238E27FC236}">
-                <a16:creationId xmlns:a16="http://schemas.microsoft.com/office/drawing/2014/main" id="{AC710283-3EBB-065B-0454-DA26E9E12809}"/>
+                <a16:creationId xmlns:a16="http://schemas.microsoft.com/office/drawing/2014/main" id="{D4C501B1-AD9B-5D1A-EB6F-8680A439CFE5}"/>
               </a:ext>
             </a:extLst>
           </p:cNvPr>
@@ -4913,7 +4913,7 @@
             <a:hlinkClick r:id="" action="ppaction://media"/>
             <a:extLst>
               <a:ext uri="{FF2B5EF4-FFF2-40B4-BE49-F238E27FC236}">
-                <a16:creationId xmlns:a16="http://schemas.microsoft.com/office/drawing/2014/main" id="{77ED0138-DB4D-57B6-13CE-A7DE8D1CF546}"/>
+                <a16:creationId xmlns:a16="http://schemas.microsoft.com/office/drawing/2014/main" id="{2BF7F58D-7594-0A95-0C3D-DA91D89361D3}"/>
               </a:ext>
             </a:extLst>
           </p:cNvPr>
@@ -4948,7 +4948,7 @@
     </p:spTree>
     <p:extLst>
       <p:ext uri="{BB962C8B-B14F-4D97-AF65-F5344CB8AC3E}">
-        <p14:creationId xmlns:p14="http://schemas.microsoft.com/office/powerpoint/2010/main" val="1859666222"/>
+        <p14:creationId xmlns:p14="http://schemas.microsoft.com/office/powerpoint/2010/main" val="3005417513"/>
       </p:ext>
     </p:extLst>
   </p:cSld>
@@ -5072,7 +5072,7 @@
           <p:cNvPr id="2" name="テキスト ボックス 1">
             <a:extLst>
               <a:ext uri="{FF2B5EF4-FFF2-40B4-BE49-F238E27FC236}">
-                <a16:creationId xmlns:a16="http://schemas.microsoft.com/office/drawing/2014/main" id="{9290EFEA-7BEC-06A7-C62E-346230FB5233}"/>
+                <a16:creationId xmlns:a16="http://schemas.microsoft.com/office/drawing/2014/main" id="{90D0E306-0CF1-DF2E-AA30-0A9CE2723F18}"/>
               </a:ext>
             </a:extLst>
           </p:cNvPr>
@@ -5118,7 +5118,7 @@
           <p:cNvPr id="3" name="テキスト ボックス 2">
             <a:extLst>
               <a:ext uri="{FF2B5EF4-FFF2-40B4-BE49-F238E27FC236}">
-                <a16:creationId xmlns:a16="http://schemas.microsoft.com/office/drawing/2014/main" id="{9F443624-8F0B-5D65-A82F-5E157F3299E6}"/>
+                <a16:creationId xmlns:a16="http://schemas.microsoft.com/office/drawing/2014/main" id="{EC435B14-9A2E-F17A-E562-718A2338DC66}"/>
               </a:ext>
             </a:extLst>
           </p:cNvPr>
@@ -5158,7 +5158,7 @@
           <p:cNvPr id="4" name="テキスト ボックス 3">
             <a:extLst>
               <a:ext uri="{FF2B5EF4-FFF2-40B4-BE49-F238E27FC236}">
-                <a16:creationId xmlns:a16="http://schemas.microsoft.com/office/drawing/2014/main" id="{1861507E-04E7-AF82-5551-84B7659DA456}"/>
+                <a16:creationId xmlns:a16="http://schemas.microsoft.com/office/drawing/2014/main" id="{AF92D198-75B4-2FAE-3D8A-75F074F37B2C}"/>
               </a:ext>
             </a:extLst>
           </p:cNvPr>
@@ -5182,20 +5182,14 @@
           <a:lstStyle/>
           <a:p>
             <a:r>
-              <a:rPr kumimoji="1" lang="en-US" altLang="ja-JP" sz="2000">
+              <a:rPr kumimoji="1" lang="ja-JP" altLang="en-US" sz="2000">
                 <a:solidFill>
                   <a:srgbClr val="333333"/>
                 </a:solidFill>
                 <a:latin typeface="Arial" panose="020B0604020202020204" pitchFamily="34" charset="0"/>
               </a:rPr>
-              <a:t>Configure hosted NearQueue release</a:t>
-            </a:r>
-            <a:endParaRPr kumimoji="1" lang="ja-JP" altLang="en-US" sz="2000">
-              <a:solidFill>
-                <a:srgbClr val="333333"/>
-              </a:solidFill>
-              <a:latin typeface="Arial" panose="020B0604020202020204" pitchFamily="34" charset="0"/>
-            </a:endParaRPr>
+              <a:t>直近のコミットでは、実装の見直しと継続的な改善が行われました。</a:t>
+            </a:r>
           </a:p>
         </p:txBody>
       </p:sp>
@@ -5204,7 +5198,7 @@
           <p:cNvPr id="5" name="テキスト ボックス 4">
             <a:extLst>
               <a:ext uri="{FF2B5EF4-FFF2-40B4-BE49-F238E27FC236}">
-                <a16:creationId xmlns:a16="http://schemas.microsoft.com/office/drawing/2014/main" id="{7342208C-09F7-1FF6-6BB9-CB44A16E3481}"/>
+                <a16:creationId xmlns:a16="http://schemas.microsoft.com/office/drawing/2014/main" id="{1A7CBE17-93A7-F499-9288-7224A3242EFA}"/>
               </a:ext>
             </a:extLst>
           </p:cNvPr>
@@ -5251,7 +5245,7 @@
             <a:hlinkClick r:id="" action="ppaction://media"/>
             <a:extLst>
               <a:ext uri="{FF2B5EF4-FFF2-40B4-BE49-F238E27FC236}">
-                <a16:creationId xmlns:a16="http://schemas.microsoft.com/office/drawing/2014/main" id="{8DAD2C30-F76D-E3BF-768D-BA33DE2E4514}"/>
+                <a16:creationId xmlns:a16="http://schemas.microsoft.com/office/drawing/2014/main" id="{6AA5F8E1-90FF-CC75-8A03-6AC9F90B1933}"/>
               </a:ext>
             </a:extLst>
           </p:cNvPr>
@@ -5286,7 +5280,7 @@
     </p:spTree>
     <p:extLst>
       <p:ext uri="{BB962C8B-B14F-4D97-AF65-F5344CB8AC3E}">
-        <p14:creationId xmlns:p14="http://schemas.microsoft.com/office/powerpoint/2010/main" val="2895922525"/>
+        <p14:creationId xmlns:p14="http://schemas.microsoft.com/office/powerpoint/2010/main" val="1164595803"/>
       </p:ext>
     </p:extLst>
   </p:cSld>
@@ -5329,7 +5323,7 @@
                                   <p:childTnLst>
                                     <p:cmd type="call" cmd="playFrom(0.0)">
                                       <p:cBhvr>
-                                        <p:cTn id="6" dur="6357" fill="hold"/>
+                                        <p:cTn id="6" dur="6076" fill="hold"/>
                                         <p:tgtEl>
                                           <p:spTgt spid="6"/>
                                         </p:tgtEl>
@@ -5410,7 +5404,7 @@
           <p:cNvPr id="2" name="テキスト ボックス 1">
             <a:extLst>
               <a:ext uri="{FF2B5EF4-FFF2-40B4-BE49-F238E27FC236}">
-                <a16:creationId xmlns:a16="http://schemas.microsoft.com/office/drawing/2014/main" id="{080D3A46-4EF3-EE88-F6EA-877E699A054B}"/>
+                <a16:creationId xmlns:a16="http://schemas.microsoft.com/office/drawing/2014/main" id="{91744244-27D9-798B-7BA8-B1AB29806EF6}"/>
               </a:ext>
             </a:extLst>
           </p:cNvPr>
@@ -5456,7 +5450,7 @@
           <p:cNvPr id="3" name="テキスト ボックス 2">
             <a:extLst>
               <a:ext uri="{FF2B5EF4-FFF2-40B4-BE49-F238E27FC236}">
-                <a16:creationId xmlns:a16="http://schemas.microsoft.com/office/drawing/2014/main" id="{A9B33CC4-5A79-9117-F633-E5C173BF72E6}"/>
+                <a16:creationId xmlns:a16="http://schemas.microsoft.com/office/drawing/2014/main" id="{B191C6A7-D593-538B-1532-285CE7F820D3}"/>
               </a:ext>
             </a:extLst>
           </p:cNvPr>
@@ -5496,7 +5490,7 @@
           <p:cNvPr id="4" name="テキスト ボックス 3">
             <a:extLst>
               <a:ext uri="{FF2B5EF4-FFF2-40B4-BE49-F238E27FC236}">
-                <a16:creationId xmlns:a16="http://schemas.microsoft.com/office/drawing/2014/main" id="{449A1914-ABE6-8386-5F8C-5CEAAE6C596D}"/>
+                <a16:creationId xmlns:a16="http://schemas.microsoft.com/office/drawing/2014/main" id="{0059B8A4-506C-6344-A045-A7B2D6C4159C}"/>
               </a:ext>
             </a:extLst>
           </p:cNvPr>
@@ -5561,7 +5555,7 @@
           <p:cNvPr id="5" name="テキスト ボックス 4">
             <a:extLst>
               <a:ext uri="{FF2B5EF4-FFF2-40B4-BE49-F238E27FC236}">
-                <a16:creationId xmlns:a16="http://schemas.microsoft.com/office/drawing/2014/main" id="{9DB75A4E-1AAA-0C97-85E0-B9101415B25A}"/>
+                <a16:creationId xmlns:a16="http://schemas.microsoft.com/office/drawing/2014/main" id="{F08C6508-5531-2465-542C-C0428324DB80}"/>
               </a:ext>
             </a:extLst>
           </p:cNvPr>
@@ -5608,7 +5602,7 @@
             <a:hlinkClick r:id="" action="ppaction://media"/>
             <a:extLst>
               <a:ext uri="{FF2B5EF4-FFF2-40B4-BE49-F238E27FC236}">
-                <a16:creationId xmlns:a16="http://schemas.microsoft.com/office/drawing/2014/main" id="{C36ACB9B-6293-109F-5041-7A1CC01A3B4B}"/>
+                <a16:creationId xmlns:a16="http://schemas.microsoft.com/office/drawing/2014/main" id="{871D058B-DA76-0137-EACD-E1A2C2EE016B}"/>
               </a:ext>
             </a:extLst>
           </p:cNvPr>
@@ -5643,7 +5637,7 @@
     </p:spTree>
     <p:extLst>
       <p:ext uri="{BB962C8B-B14F-4D97-AF65-F5344CB8AC3E}">
-        <p14:creationId xmlns:p14="http://schemas.microsoft.com/office/powerpoint/2010/main" val="6653031"/>
+        <p14:creationId xmlns:p14="http://schemas.microsoft.com/office/powerpoint/2010/main" val="2527169221"/>
       </p:ext>
     </p:extLst>
   </p:cSld>
